--- a/MetLife_Insights_Deck.pptx
+++ b/MetLife_Insights_Deck.pptx
@@ -19,9 +19,10 @@
     <p:sldId id="267" r:id="rId13"/>
     <p:sldId id="268" r:id="rId14"/>
     <p:sldId id="269" r:id="rId15"/>
+    <p:sldId id="270" r:id="rId16"/>
   </p:sldIdLst>
   <p:notesMasterIdLst>
-    <p:notesMasterId r:id="rId16"/>
+    <p:notesMasterId r:id="rId17"/>
   </p:notesMasterIdLst>
   <p:sldSz cx="12191695" cy="6858000"/>
   <p:notesSz cx="6858000" cy="12191695"/>
@@ -786,7 +787,7 @@
           <a:p>
             <a:r>
               <a:rPr lang="en-US" dirty="0"/>
-              <a:t>Framing: this is not just a model — it is a decision-support product. The headline is that the simplest, most explainable model wins, and we made it usable by non-technical underwriters through an app with a GenAI assistant.</a:t>
+              <a:t>WHAT TO SAY: Open with the thesis in one line — "I built an explainable model that flags high-risk customers, and wrapped it in a self-serve app so underwriters, not just data scientists, can use it." Give the headline number: AUROC 0.78, and the surprise — the SIMPLEST model won. Tell them the agenda: the data and stats, the model choice, the business call on the threshold, and a live demo of the app plus a GenAI assistant. Keep it to ~30 seconds and move on.</a:t>
             </a:r>
             <a:endParaRPr lang="en-US" dirty="0"/>
           </a:p>
@@ -874,7 +875,7 @@
           <a:p>
             <a:r>
               <a:rPr lang="en-US" dirty="0"/>
-              <a:t>The exact threshold is a business decision, not a statistical constant. Tie it to the loss-ratio target.</a:t>
+              <a:t>WHAT TO SAY: This is the business decision. Lower the threshold below 0.50, because a missed high-risk customer hurts the loss ratio far more than an over-flag. The optimum is cost-driven; at a 10:1 cost ratio it lands around 0.08. Be honest that 0.08 is aggressive and illustrative — in production you calibrate the ratio to real claim costs. That is exactly why the app makes the threshold a live business dial, not a fixed statistic.</a:t>
             </a:r>
             <a:endParaRPr lang="en-US" dirty="0"/>
           </a:p>
@@ -962,7 +963,7 @@
           <a:p>
             <a:r>
               <a:rPr lang="en-US" dirty="0"/>
-              <a:t>This is the "usable by non-tech people" requirement, delivered. Demo the app live here if possible.</a:t>
+              <a:t>WHAT TO SAY: This answers the "usable by non-technical people" requirement directly. Five tabs take the model out of the notebook and into an underwriter's hands. If you can, switch to the live app right here and demo — predict a customer, open the SHAP view, load a random real customer, then flip to the threshold and portfolio tabs.</a:t>
             </a:r>
             <a:endParaRPr lang="en-US" dirty="0"/>
           </a:p>
@@ -1050,7 +1051,7 @@
           <a:p>
             <a:r>
               <a:rPr lang="en-US" dirty="0"/>
-              <a:t>The GenAI layer is the optimization the interviewer asked about. Emphasize grounding: LLM phrases, Python computes. This is how you get GenAI value without hallucination risk in a regulated setting.</a:t>
+              <a:t>WHAT TO SAY: This is the GenAI optimization. The one idea to land is GROUNDING — the LLM never computes a number; pandas computes it and the LLM only phrases it, so there are zero hallucinated statistics. That makes GenAI safe in a regulated setting. It runs free on Groq (Llama 3.3 70B) and falls back to exact template text offline, so the demo cannot break. Frame it as responsible AI, not a gimmick.</a:t>
             </a:r>
             <a:endParaRPr lang="en-US" dirty="0"/>
           </a:p>
@@ -1138,7 +1139,7 @@
           <a:p>
             <a:r>
               <a:rPr lang="en-US" dirty="0"/>
-              <a:t>Close the analysis with clear, prioritized actions in business language.</a:t>
+              <a:t>WHAT TO SAY: Close the analysis with four concrete actions in business language: adopt the explainable model, tune the threshold to the loss-ratio target, focus scrutiny on age/health segments, and roll the app out to teams. Add the responsible-use caveat: this is a screening aid with a human in the loop, not an automatic decline engine.</a:t>
             </a:r>
             <a:endParaRPr lang="en-US" dirty="0"/>
           </a:p>
@@ -1226,7 +1227,7 @@
           <a:p>
             <a:r>
               <a:rPr lang="en-US" dirty="0"/>
-              <a:t/>
+              <a:t>WHAT TO SAY: Recap the three pillars in one breath — accurate where it counts, explainable by design, usable by everyone — then open for questions. Point them to the appendix for the app, repo and document links. If time allows, end on the live app rather than this slide.</a:t>
             </a:r>
             <a:endParaRPr lang="en-US" dirty="0"/>
           </a:p>
@@ -1250,6 +1251,94 @@
             <a:fld id="{F7021451-1387-4CA6-816F-3879F97B5CBC}" type="slidenum">
               <a:rPr lang="en-US"/>
               <a:t>14</a:t>
+            </a:fld>
+            <a:endParaRPr lang="en-US"/>
+          </a:p>
+        </p:txBody>
+      </p:sp>
+    </p:spTree>
+    <p:extLst>
+      <p:ext uri="{BB962C8B-B14F-4D97-AF65-F5344CB8AC3E}">
+        <p14:creationId xmlns:p14="http://schemas.microsoft.com/office/powerpoint/2010/main" val="1024086991"/>
+      </p:ext>
+    </p:extLst>
+  </p:cSld>
+  <p:clrMapOvr>
+    <a:masterClrMapping/>
+  </p:clrMapOvr>
+</p:notes>
+</file>
+
+<file path=ppt/notesSlides/notesSlide15.xml><?xml version="1.0" encoding="utf-8"?>
+<p:notes xmlns:a="http://schemas.openxmlformats.org/drawingml/2006/main" xmlns:r="http://schemas.openxmlformats.org/officeDocument/2006/relationships" xmlns:p="http://schemas.openxmlformats.org/presentationml/2006/main">
+  <p:cSld>
+    <p:spTree>
+      <p:nvGrpSpPr>
+        <p:cNvPr id="1" name=""/>
+        <p:cNvGrpSpPr/>
+        <p:nvPr/>
+      </p:nvGrpSpPr>
+      <p:grpSpPr>
+        <a:xfrm>
+          <a:off x="0" y="0"/>
+          <a:ext cx="0" cy="0"/>
+          <a:chOff x="0" y="0"/>
+          <a:chExt cx="0" cy="0"/>
+        </a:xfrm>
+      </p:grpSpPr>
+      <p:sp>
+        <p:nvSpPr>
+          <p:cNvPr id="2" name="Slide Image Placeholder 1"/>
+          <p:cNvSpPr>
+            <a:spLocks noGrp="1" noRot="1" noChangeAspect="1"/>
+          </p:cNvSpPr>
+          <p:nvPr>
+            <p:ph type="sldImg"/>
+          </p:nvPr>
+        </p:nvSpPr>
+        <p:spPr/>
+      </p:sp>
+      <p:sp>
+        <p:nvSpPr>
+          <p:cNvPr id="3" name="Notes Placeholder 2"/>
+          <p:cNvSpPr>
+            <a:spLocks noGrp="1"/>
+          </p:cNvSpPr>
+          <p:nvPr>
+            <p:ph type="body" idx="1"/>
+          </p:nvPr>
+        </p:nvSpPr>
+        <p:spPr/>
+        <p:txBody>
+          <a:bodyPr/>
+          <a:lstStyle/>
+          <a:p>
+            <a:r>
+              <a:rPr lang="en-US" dirty="0"/>
+              <a:t>WHAT TO SAY: Keep this slide up during Q&amp;A so reviewers can find everything. Before the interview, fill in the deployed Streamlit app URL and confirm the GitHub link, and attach or link the answers document, this deck and the technical guide. This is your one-stop reference slide.</a:t>
+            </a:r>
+            <a:endParaRPr lang="en-US" dirty="0"/>
+          </a:p>
+        </p:txBody>
+      </p:sp>
+      <p:sp>
+        <p:nvSpPr>
+          <p:cNvPr id="4" name="Slide Number Placeholder 3"/>
+          <p:cNvSpPr>
+            <a:spLocks noGrp="1"/>
+          </p:cNvSpPr>
+          <p:nvPr>
+            <p:ph type="sldNum" sz="quarter" idx="10"/>
+          </p:nvPr>
+        </p:nvSpPr>
+        <p:spPr/>
+        <p:txBody>
+          <a:bodyPr/>
+          <a:lstStyle/>
+          <a:p>
+            <a:fld id="{F7021451-1387-4CA6-816F-3879F97B5CBC}" type="slidenum">
+              <a:rPr lang="en-US"/>
+              <a:t>15</a:t>
             </a:fld>
             <a:endParaRPr lang="en-US"/>
           </a:p>
@@ -1314,7 +1403,7 @@
           <a:p>
             <a:r>
               <a:rPr lang="en-US" dirty="0"/>
-              <a:t>Set the stakes in business terms before any statistics. The loss ratio is the language executives think in.</a:t>
+              <a:t>WHAT TO SAY: Frame the stakes in business language before any statistics. Define the loss ratio in one sentence — claims divided by premiums — and say the model exists to price risk correctly so that ratio stays healthy. Name the three goals: accuracy, explainability, usability. Plant the key asymmetry now — a missed high-risk customer costs roughly 10× an over-flag — because it pays off on the threshold slide.</a:t>
             </a:r>
             <a:endParaRPr lang="en-US" dirty="0"/>
           </a:p>
@@ -1402,7 +1491,7 @@
           <a:p>
             <a:r>
               <a:rPr lang="en-US" dirty="0"/>
-              <a:t>Big numbers land faster than a table. Note the data-quality catch (age=200) — it signals rigor.</a:t>
+              <a:t>WHAT TO SAY: Walk the four big numbers left to right. Then raise the two nuances that show senior judgment: income is symmetric so mean ≈ median (a rule that does not actually apply here), and the target is ~46% positive — near balanced, not extreme imbalance. Finally, mention you caught 100 impossible age = 200 values and capped them; profiling before modeling is basic hygiene that protects a production model.</a:t>
             </a:r>
             <a:endParaRPr lang="en-US" dirty="0"/>
           </a:p>
@@ -1490,7 +1579,7 @@
           <a:p>
             <a:r>
               <a:rPr lang="en-US" dirty="0"/>
-              <a:t>Reproducibility is a senior signal. One script → all artifacts.</a:t>
+              <a:t>WHAT TO SAY: Five steps, one script. The message here is rigor and reproducibility — a single command regenerates every number and chart, so the deck, the written answers and the app can never disagree. Emphasize that clean → test → model → insight → product is a repeatable workflow, not a one-off notebook.</a:t>
             </a:r>
             <a:endParaRPr lang="en-US" dirty="0"/>
           </a:p>
@@ -1578,7 +1667,7 @@
           <a:p>
             <a:r>
               <a:rPr lang="en-US" dirty="0"/>
-              <a:t>Answer: median. But the nuance — income is symmetric so it barely matters — is what separates a rote answer from a real one.</a:t>
+              <a:t>WHAT TO SAY: The answer is the median, but the real point is method — I measured the skew instead of assuming it. It is 0.04, essentially symmetric, so mean and median are basically identical here and the choice barely matters. The genuinely skewed column is past_claims_amount. Showing you do not apply textbook rules blindly is the takeaway.</a:t>
             </a:r>
             <a:endParaRPr lang="en-US" dirty="0"/>
           </a:p>
@@ -1666,7 +1755,7 @@
           <a:p>
             <a:r>
               <a:rPr lang="en-US" dirty="0"/>
-              <a:t>This is the slide to linger on. The business takeaway: focus underwriting on age and health; ignore income/BMI which carry no signal.</a:t>
+              <a:t>WHAT TO SAY: This is the slide to linger on — it is the core finding. Two features drive risk: age pushes it up, health score pulls it down, and everything else is essentially noise. The business translation is concrete: focus underwriting scrutiny on age and health; do not let income or BMI sway decisions on this data. If asked, note this pattern strongly suggests a synthetic dataset built mainly from age and health.</a:t>
             </a:r>
             <a:endParaRPr lang="en-US" dirty="0"/>
           </a:p>
@@ -1754,7 +1843,7 @@
           <a:p>
             <a:r>
               <a:rPr lang="en-US" dirty="0"/>
-              <a:t>T-test for continuous vs binary; Chi-square for categorical; VIF for multicollinearity. The honest finding: policy_type has no signal, and there is no collinearity to fix.</a:t>
+              <a:t>WHAT TO SAY: Show you pick the right test for each data type — Welch t-test for a continuous feature vs a binary target (Welch because variances are not assumed equal), Chi-square for categoricals, VIF for multicollinearity. The honest findings matter: policy_type has NO relationship with risk (p = 0.57), and there is no multicollinearity to fix (all VIFs ≈ 1). I still used L2 regularization as a safeguard.</a:t>
             </a:r>
             <a:endParaRPr lang="en-US" dirty="0"/>
           </a:p>
@@ -1842,7 +1931,7 @@
           <a:p>
             <a:r>
               <a:rPr lang="en-US" dirty="0"/>
-              <a:t>Key point: Logistic Regression is both the most accurate AND the most explainable here, so complexity is not justified. Explainability pros/cons live in the doc.</a:t>
+              <a:t>WHAT TO SAY: The punchline — Logistic Regression ties Gradient Boosting on AUROC and beats Random Forest, while being far more explainable, so complexity is not justified. Explain the metric choice: because errors are asymmetric and AUROC is threshold-free, I lead with AUROC and F1, not accuracy. And every coefficient is an odds ratio an underwriter or regulator can read — that is the explainability insurance requires.</a:t>
             </a:r>
             <a:endParaRPr lang="en-US" dirty="0"/>
           </a:p>
@@ -1930,7 +2019,7 @@
           <a:p>
             <a:r>
               <a:rPr lang="en-US" dirty="0"/>
-              <a:t>Top drivers: age, then health_score, then chronic disease. Express as odds ratios so the business can act.</a:t>
+              <a:t>WHAT TO SAY: Translate the model into business language. Per one standard deviation of age, the odds of high-risk roughly triple; health score is protective (odds ×0.55); chronic disease adds a smaller push. These numbers come straight from the coefficients — no black box. Permutation importance (the chart) confirms the same ranking.</a:t>
             </a:r>
             <a:endParaRPr lang="en-US" dirty="0"/>
           </a:p>
@@ -2285,7 +2374,7 @@
     <p:bg>
       <p:bgPr>
         <a:solidFill>
-          <a:srgbClr val="12283A"/>
+          <a:srgbClr val="FFFFFF"/>
         </a:solidFill>
       </p:bgPr>
     </p:bg>
@@ -2311,14 +2400,14 @@
         </p:nvSpPr>
         <p:spPr>
           <a:xfrm>
-            <a:off x="0" y="0"/>
-            <a:ext cx="12191695" cy="6858000"/>
-          </a:xfrm>
-          <a:prstGeom prst="rect">
+            <a:off x="9052560" y="-1737360"/>
+            <a:ext cx="5486400" cy="5486400"/>
+          </a:xfrm>
+          <a:prstGeom prst="ellipse">
             <a:avLst/>
           </a:prstGeom>
           <a:solidFill>
-            <a:srgbClr val="12283A"/>
+            <a:srgbClr val="EAF4FB"/>
           </a:solidFill>
           <a:ln/>
         </p:spPr>
@@ -2331,15 +2420,35 @@
         </p:nvSpPr>
         <p:spPr>
           <a:xfrm>
-            <a:off x="8869680" y="-1463040"/>
-            <a:ext cx="5120640" cy="5120640"/>
+            <a:off x="10149840" y="2926080"/>
+            <a:ext cx="4206240" cy="4206240"/>
           </a:xfrm>
           <a:prstGeom prst="ellipse">
             <a:avLst/>
           </a:prstGeom>
           <a:solidFill>
-            <a:srgbClr val="0090DA">
-              <a:alpha val="18000"/>
+            <a:srgbClr val="EAF7F0"/>
+          </a:solidFill>
+          <a:ln/>
+        </p:spPr>
+      </p:sp>
+      <p:sp>
+        <p:nvSpPr>
+          <p:cNvPr id="4" name="Shape 2"/>
+          <p:cNvSpPr/>
+          <p:nvPr/>
+        </p:nvSpPr>
+        <p:spPr>
+          <a:xfrm>
+            <a:off x="11018520" y="822960"/>
+            <a:ext cx="1371600" cy="1371600"/>
+          </a:xfrm>
+          <a:prstGeom prst="ellipse">
+            <a:avLst/>
+          </a:prstGeom>
+          <a:solidFill>
+            <a:srgbClr val="00A758">
+              <a:alpha val="40000"/>
             </a:srgbClr>
           </a:solidFill>
           <a:ln/>
@@ -2347,36 +2456,14 @@
       </p:sp>
       <p:sp>
         <p:nvSpPr>
-          <p:cNvPr id="4" name="Shape 2"/>
-          <p:cNvSpPr/>
-          <p:nvPr/>
-        </p:nvSpPr>
-        <p:spPr>
-          <a:xfrm>
-            <a:off x="10058400" y="2926080"/>
-            <a:ext cx="3840480" cy="3840480"/>
-          </a:xfrm>
-          <a:prstGeom prst="ellipse">
-            <a:avLst/>
-          </a:prstGeom>
-          <a:solidFill>
-            <a:srgbClr val="00A758">
-              <a:alpha val="18000"/>
-            </a:srgbClr>
-          </a:solidFill>
-          <a:ln/>
-        </p:spPr>
-      </p:sp>
-      <p:sp>
-        <p:nvSpPr>
           <p:cNvPr id="5" name="Shape 3"/>
           <p:cNvSpPr/>
           <p:nvPr/>
         </p:nvSpPr>
         <p:spPr>
           <a:xfrm>
-            <a:off x="822960" y="1051560"/>
-            <a:ext cx="2743200" cy="310896"/>
+            <a:off x="822960" y="914400"/>
+            <a:ext cx="3200400" cy="310896"/>
           </a:xfrm>
           <a:prstGeom prst="roundRect">
             <a:avLst>
@@ -2397,8 +2484,8 @@
         </p:nvSpPr>
         <p:spPr>
           <a:xfrm>
-            <a:off x="822960" y="1051560"/>
-            <a:ext cx="2743200" cy="310896"/>
+            <a:off x="822960" y="914400"/>
+            <a:ext cx="3200400" cy="310896"/>
           </a:xfrm>
           <a:prstGeom prst="rect">
             <a:avLst/>
@@ -2422,7 +2509,7 @@
                 <a:ea typeface="Calibri" pitchFamily="34" charset="-122"/>
                 <a:cs typeface="Calibri" pitchFamily="34" charset="-120"/>
               </a:rPr>
-              <a:t>🛡  METLIFE JAPAN · DATA &amp; AI</a:t>
+              <a:t>DATA &amp; AI · RISK MODELING</a:t>
             </a:r>
             <a:endParaRPr lang="en-US" sz="1100" dirty="0"/>
           </a:p>
@@ -2436,8 +2523,8 @@
         </p:nvSpPr>
         <p:spPr>
           <a:xfrm>
-            <a:off x="777240" y="1737360"/>
-            <a:ext cx="8961120" cy="2011680"/>
+            <a:off x="777240" y="1508760"/>
+            <a:ext cx="8778240" cy="1920240"/>
           </a:xfrm>
           <a:prstGeom prst="rect">
             <a:avLst/>
@@ -2458,7 +2545,7 @@
             <a:r>
               <a:rPr lang="en-US" sz="4600" b="1" dirty="0">
                 <a:solidFill>
-                  <a:srgbClr val="FFFFFF"/>
+                  <a:srgbClr val="1B2A38"/>
                 </a:solidFill>
                 <a:latin typeface="Cambria" pitchFamily="34" charset="0"/>
                 <a:ea typeface="Cambria" pitchFamily="34" charset="-122"/>
@@ -2478,7 +2565,7 @@
             <a:r>
               <a:rPr lang="en-US" sz="4600" b="1" dirty="0">
                 <a:solidFill>
-                  <a:srgbClr val="FFFFFF"/>
+                  <a:srgbClr val="1B2A38"/>
                 </a:solidFill>
                 <a:latin typeface="Cambria" pitchFamily="34" charset="0"/>
                 <a:ea typeface="Cambria" pitchFamily="34" charset="-122"/>
@@ -2498,8 +2585,8 @@
         </p:nvSpPr>
         <p:spPr>
           <a:xfrm>
-            <a:off x="822960" y="3794760"/>
-            <a:ext cx="8686800" cy="640080"/>
+            <a:off x="822960" y="3429000"/>
+            <a:ext cx="8412480" cy="640080"/>
           </a:xfrm>
           <a:prstGeom prst="rect">
             <a:avLst/>
@@ -2517,7 +2604,7 @@
             <a:r>
               <a:rPr lang="en-US" sz="1800" dirty="0">
                 <a:solidFill>
-                  <a:srgbClr val="CADCEC"/>
+                  <a:srgbClr val="5B6770"/>
                 </a:solidFill>
                 <a:latin typeface="Calibri" pitchFamily="34" charset="0"/>
                 <a:ea typeface="Calibri" pitchFamily="34" charset="-122"/>
@@ -2537,7 +2624,7 @@
         </p:nvSpPr>
         <p:spPr>
           <a:xfrm>
-            <a:off x="822960" y="4937760"/>
+            <a:off x="822960" y="4297680"/>
             <a:ext cx="10058400" cy="365760"/>
           </a:xfrm>
           <a:prstGeom prst="rect">
@@ -2570,7 +2657,7 @@
             <a:r>
               <a:rPr lang="en-US" sz="1400" dirty="0">
                 <a:solidFill>
-                  <a:srgbClr val="CADCEC"/>
+                  <a:srgbClr val="1B2A38"/>
                 </a:solidFill>
                 <a:latin typeface="Calibri" pitchFamily="34" charset="0"/>
                 <a:ea typeface="Calibri" pitchFamily="34" charset="-122"/>
@@ -2584,40 +2671,183 @@
       </p:sp>
       <p:sp>
         <p:nvSpPr>
-          <p:cNvPr id="10" name="Text 8"/>
-          <p:cNvSpPr/>
-          <p:nvPr/>
-        </p:nvSpPr>
-        <p:spPr>
-          <a:xfrm>
-            <a:off x="822960" y="5943600"/>
-            <a:ext cx="7315200" cy="365760"/>
-          </a:xfrm>
-          <a:prstGeom prst="rect">
-            <a:avLst/>
-          </a:prstGeom>
-          <a:noFill/>
-          <a:ln/>
-        </p:spPr>
-        <p:txBody>
-          <a:bodyPr wrap="square" lIns="0" tIns="0" rIns="0" bIns="0" rtlCol="0" anchor="ctr"/>
-          <a:lstStyle/>
-          <a:p>
-            <a:pPr indent="0" marL="0">
-              <a:buNone/>
-            </a:pPr>
-            <a:r>
-              <a:rPr lang="en-US" sz="1200" i="1" dirty="0">
-                <a:solidFill>
-                  <a:srgbClr val="8FA6B8"/>
-                </a:solidFill>
-                <a:latin typeface="Calibri" pitchFamily="34" charset="0"/>
-                <a:ea typeface="Calibri" pitchFamily="34" charset="-122"/>
-                <a:cs typeface="Calibri" pitchFamily="34" charset="-120"/>
-              </a:rPr>
-              <a:t>Senior Data Scientist — Take-Home Assignment</a:t>
-            </a:r>
-            <a:endParaRPr lang="en-US" sz="1200" dirty="0"/>
+          <p:cNvPr id="10" name="Shape 8"/>
+          <p:cNvSpPr/>
+          <p:nvPr/>
+        </p:nvSpPr>
+        <p:spPr>
+          <a:xfrm>
+            <a:off x="868680" y="4983480"/>
+            <a:ext cx="4754880" cy="0"/>
+          </a:xfrm>
+          <a:prstGeom prst="line">
+            <a:avLst/>
+          </a:prstGeom>
+          <a:noFill/>
+          <a:ln w="19050">
+            <a:solidFill>
+              <a:srgbClr val="E7EFF5"/>
+            </a:solidFill>
+            <a:prstDash val="solid"/>
+          </a:ln>
+        </p:spPr>
+      </p:sp>
+      <p:sp>
+        <p:nvSpPr>
+          <p:cNvPr id="11" name="Text 9"/>
+          <p:cNvSpPr/>
+          <p:nvPr/>
+        </p:nvSpPr>
+        <p:spPr>
+          <a:xfrm>
+            <a:off x="868680" y="5166360"/>
+            <a:ext cx="8229600" cy="292608"/>
+          </a:xfrm>
+          <a:prstGeom prst="rect">
+            <a:avLst/>
+          </a:prstGeom>
+          <a:noFill/>
+          <a:ln/>
+        </p:spPr>
+        <p:txBody>
+          <a:bodyPr wrap="square" lIns="0" tIns="0" rIns="0" bIns="0" rtlCol="0" anchor="ctr"/>
+          <a:lstStyle/>
+          <a:p>
+            <a:pPr indent="0" marL="0">
+              <a:buNone/>
+            </a:pPr>
+            <a:r>
+              <a:rPr lang="en-US" sz="1500" dirty="0">
+                <a:solidFill>
+                  <a:srgbClr val="5B6770"/>
+                </a:solidFill>
+                <a:latin typeface="Calibri" pitchFamily="34" charset="0"/>
+                <a:ea typeface="Calibri" pitchFamily="34" charset="-122"/>
+                <a:cs typeface="Calibri" pitchFamily="34" charset="-120"/>
+              </a:rPr>
+              <a:t>Submitted by  </a:t>
+            </a:r>
+            <a:pPr indent="0" marL="0">
+              <a:buNone/>
+            </a:pPr>
+            <a:r>
+              <a:rPr lang="en-US" sz="1500" b="1" dirty="0">
+                <a:solidFill>
+                  <a:srgbClr val="1B2A38"/>
+                </a:solidFill>
+                <a:latin typeface="Calibri" pitchFamily="34" charset="0"/>
+                <a:ea typeface="Calibri" pitchFamily="34" charset="-122"/>
+                <a:cs typeface="Calibri" pitchFamily="34" charset="-120"/>
+              </a:rPr>
+              <a:t>Pavel Daulat Bodle</a:t>
+            </a:r>
+            <a:endParaRPr lang="en-US" sz="1500" dirty="0"/>
+          </a:p>
+        </p:txBody>
+      </p:sp>
+      <p:sp>
+        <p:nvSpPr>
+          <p:cNvPr id="12" name="Text 10"/>
+          <p:cNvSpPr/>
+          <p:nvPr/>
+        </p:nvSpPr>
+        <p:spPr>
+          <a:xfrm>
+            <a:off x="868680" y="5477256"/>
+            <a:ext cx="8229600" cy="274320"/>
+          </a:xfrm>
+          <a:prstGeom prst="rect">
+            <a:avLst/>
+          </a:prstGeom>
+          <a:noFill/>
+          <a:ln/>
+        </p:spPr>
+        <p:txBody>
+          <a:bodyPr wrap="square" lIns="0" tIns="0" rIns="0" bIns="0" rtlCol="0" anchor="ctr"/>
+          <a:lstStyle/>
+          <a:p>
+            <a:pPr indent="0" marL="0">
+              <a:buNone/>
+            </a:pPr>
+            <a:r>
+              <a:rPr lang="en-US" sz="1250" dirty="0">
+                <a:solidFill>
+                  <a:srgbClr val="5B6770"/>
+                </a:solidFill>
+                <a:latin typeface="Calibri" pitchFamily="34" charset="0"/>
+                <a:ea typeface="Calibri" pitchFamily="34" charset="-122"/>
+                <a:cs typeface="Calibri" pitchFamily="34" charset="-120"/>
+              </a:rPr>
+              <a:t>Senior AI Engineer</a:t>
+            </a:r>
+            <a:endParaRPr lang="en-US" sz="1250" dirty="0"/>
+          </a:p>
+        </p:txBody>
+      </p:sp>
+      <p:sp>
+        <p:nvSpPr>
+          <p:cNvPr id="13" name="Text 11"/>
+          <p:cNvSpPr/>
+          <p:nvPr/>
+        </p:nvSpPr>
+        <p:spPr>
+          <a:xfrm>
+            <a:off x="868680" y="5806440"/>
+            <a:ext cx="10515600" cy="274320"/>
+          </a:xfrm>
+          <a:prstGeom prst="rect">
+            <a:avLst/>
+          </a:prstGeom>
+          <a:noFill/>
+          <a:ln/>
+        </p:spPr>
+        <p:txBody>
+          <a:bodyPr wrap="square" lIns="0" tIns="0" rIns="0" bIns="0" rtlCol="0" anchor="ctr"/>
+          <a:lstStyle/>
+          <a:p>
+            <a:pPr indent="0" marL="0">
+              <a:buNone/>
+            </a:pPr>
+            <a:r>
+              <a:rPr lang="en-US" sz="1150" dirty="0">
+                <a:solidFill>
+                  <a:srgbClr val="0090DA"/>
+                </a:solidFill>
+                <a:latin typeface="Calibri" pitchFamily="34" charset="0"/>
+                <a:ea typeface="Calibri" pitchFamily="34" charset="-122"/>
+                <a:cs typeface="Calibri" pitchFamily="34" charset="-120"/>
+              </a:rPr>
+              <a:t>🔗 linkedin.com/in/pavelbodle</a:t>
+            </a:r>
+            <a:pPr indent="0" marL="0">
+              <a:buNone/>
+            </a:pPr>
+            <a:r>
+              <a:rPr lang="en-US" sz="1150" dirty="0">
+                <a:solidFill>
+                  <a:srgbClr val="0090DA"/>
+                </a:solidFill>
+                <a:latin typeface="Calibri" pitchFamily="34" charset="0"/>
+                <a:ea typeface="Calibri" pitchFamily="34" charset="-122"/>
+                <a:cs typeface="Calibri" pitchFamily="34" charset="-120"/>
+              </a:rPr>
+              <a:t>      🐙 github.com/pavelbodle</a:t>
+            </a:r>
+            <a:pPr indent="0" marL="0">
+              <a:buNone/>
+            </a:pPr>
+            <a:r>
+              <a:rPr lang="en-US" sz="1150" dirty="0">
+                <a:solidFill>
+                  <a:srgbClr val="0090DA"/>
+                </a:solidFill>
+                <a:latin typeface="Calibri" pitchFamily="34" charset="0"/>
+                <a:ea typeface="Calibri" pitchFamily="34" charset="-122"/>
+                <a:cs typeface="Calibri" pitchFamily="34" charset="-120"/>
+              </a:rPr>
+              <a:t>      📧 paveliitb@gmail.com</a:t>
+            </a:r>
+            <a:endParaRPr lang="en-US" sz="1150" dirty="0"/>
           </a:p>
         </p:txBody>
       </p:sp>
@@ -3088,7 +3318,7 @@
                 <a:ea typeface="Calibri" pitchFamily="34" charset="-122"/>
                 <a:cs typeface="Calibri" pitchFamily="34" charset="-120"/>
               </a:rPr>
-              <a:t>MetLife Japan · High-Risk Customer Prediction</a:t>
+              <a:t>High-Risk Customer Prediction · Pavel Bodle</a:t>
             </a:r>
             <a:endParaRPr lang="en-US" sz="900" dirty="0"/>
           </a:p>
@@ -4185,7 +4415,7 @@
                 <a:ea typeface="Calibri" pitchFamily="34" charset="-122"/>
                 <a:cs typeface="Calibri" pitchFamily="34" charset="-120"/>
               </a:rPr>
-              <a:t>MetLife Japan · High-Risk Customer Prediction</a:t>
+              <a:t>High-Risk Customer Prediction · Pavel Bodle</a:t>
             </a:r>
             <a:endParaRPr lang="en-US" sz="900" dirty="0"/>
           </a:p>
@@ -4442,7 +4672,7 @@
                 <a:ea typeface="Calibri" pitchFamily="34" charset="-122"/>
                 <a:cs typeface="Calibri" pitchFamily="34" charset="-120"/>
               </a:rPr>
-              <a:t>Turns the risk score + drivers into a plain-English explanation an underwriter can trust: “High-risk (72%), driven mainly by age 78 and a low health score of 41…”</a:t>
+              <a:t>Turns the risk score + drivers into a plain-English explanation an underwriter can trust: "High-risk (72%), driven mainly by age 78 and a low health score of 41…"</a:t>
             </a:r>
             <a:endParaRPr lang="en-US" sz="1350" dirty="0"/>
           </a:p>
@@ -4589,7 +4819,7 @@
                 <a:ea typeface="Calibri" pitchFamily="34" charset="-122"/>
                 <a:cs typeface="Calibri" pitchFamily="34" charset="-120"/>
               </a:rPr>
-              <a:t>Managers ask in natural language — “high-risk rate for customers over 60?” — and get an instant answer. Numbers are computed in Python first, then phrased by the LLM.</a:t>
+              <a:t>Managers ask in natural language — "high-risk rate for customers over 60?" — and get an instant answer. Numbers are computed in Python first, then phrased by the LLM.</a:t>
             </a:r>
             <a:endParaRPr lang="en-US" sz="1350" dirty="0"/>
           </a:p>
@@ -4748,7 +4978,7 @@
                 <a:ea typeface="Calibri" pitchFamily="34" charset="-122"/>
                 <a:cs typeface="Calibri" pitchFamily="34" charset="-120"/>
               </a:rPr>
-              <a:t>MetLife Japan · High-Risk Customer Prediction</a:t>
+              <a:t>High-Risk Customer Prediction · Pavel Bodle</a:t>
             </a:r>
             <a:endParaRPr lang="en-US" sz="900" dirty="0"/>
           </a:p>
@@ -4897,7 +5127,7 @@
                 <a:ea typeface="Cambria" pitchFamily="34" charset="-122"/>
                 <a:cs typeface="Cambria" pitchFamily="34" charset="-120"/>
               </a:rPr>
-              <a:t>What we recommend MetLife do next</a:t>
+              <a:t>What we recommend next</a:t>
             </a:r>
             <a:endParaRPr lang="en-US" sz="3200" dirty="0"/>
           </a:p>
@@ -5484,7 +5714,7 @@
                 <a:ea typeface="Calibri" pitchFamily="34" charset="-122"/>
                 <a:cs typeface="Calibri" pitchFamily="34" charset="-120"/>
               </a:rPr>
-              <a:t>MetLife Japan · High-Risk Customer Prediction</a:t>
+              <a:t>High-Risk Customer Prediction · Pavel Bodle</a:t>
             </a:r>
             <a:endParaRPr lang="en-US" sz="900" dirty="0"/>
           </a:p>
@@ -5543,7 +5773,7 @@
     <p:bg>
       <p:bgPr>
         <a:solidFill>
-          <a:srgbClr val="12283A"/>
+          <a:srgbClr val="FFFFFF"/>
         </a:solidFill>
       </p:bgPr>
     </p:bg>
@@ -5569,15 +5799,55 @@
         </p:nvSpPr>
         <p:spPr>
           <a:xfrm>
-            <a:off x="-1645920" y="3840480"/>
-            <a:ext cx="5029200" cy="5029200"/>
+            <a:off x="-1828800" y="3566160"/>
+            <a:ext cx="5486400" cy="5486400"/>
           </a:xfrm>
           <a:prstGeom prst="ellipse">
             <a:avLst/>
           </a:prstGeom>
           <a:solidFill>
-            <a:srgbClr val="0090DA">
-              <a:alpha val="16000"/>
+            <a:srgbClr val="EAF4FB"/>
+          </a:solidFill>
+          <a:ln/>
+        </p:spPr>
+      </p:sp>
+      <p:sp>
+        <p:nvSpPr>
+          <p:cNvPr id="3" name="Shape 1"/>
+          <p:cNvSpPr/>
+          <p:nvPr/>
+        </p:nvSpPr>
+        <p:spPr>
+          <a:xfrm>
+            <a:off x="9509760" y="-1828800"/>
+            <a:ext cx="4937760" cy="4937760"/>
+          </a:xfrm>
+          <a:prstGeom prst="ellipse">
+            <a:avLst/>
+          </a:prstGeom>
+          <a:solidFill>
+            <a:srgbClr val="EAF7F0"/>
+          </a:solidFill>
+          <a:ln/>
+        </p:spPr>
+      </p:sp>
+      <p:sp>
+        <p:nvSpPr>
+          <p:cNvPr id="4" name="Shape 2"/>
+          <p:cNvSpPr/>
+          <p:nvPr/>
+        </p:nvSpPr>
+        <p:spPr>
+          <a:xfrm>
+            <a:off x="1005840" y="4754880"/>
+            <a:ext cx="1188720" cy="1188720"/>
+          </a:xfrm>
+          <a:prstGeom prst="ellipse">
+            <a:avLst/>
+          </a:prstGeom>
+          <a:solidFill>
+            <a:srgbClr val="00A758">
+              <a:alpha val="45000"/>
             </a:srgbClr>
           </a:solidFill>
           <a:ln/>
@@ -5585,35 +5855,13 @@
       </p:sp>
       <p:sp>
         <p:nvSpPr>
-          <p:cNvPr id="3" name="Shape 1"/>
-          <p:cNvSpPr/>
-          <p:nvPr/>
-        </p:nvSpPr>
-        <p:spPr>
-          <a:xfrm>
-            <a:off x="9326880" y="-1645920"/>
-            <a:ext cx="4572000" cy="4572000"/>
-          </a:xfrm>
-          <a:prstGeom prst="ellipse">
-            <a:avLst/>
-          </a:prstGeom>
-          <a:solidFill>
-            <a:srgbClr val="00A758">
-              <a:alpha val="16000"/>
-            </a:srgbClr>
-          </a:solidFill>
-          <a:ln/>
-        </p:spPr>
-      </p:sp>
-      <p:sp>
-        <p:nvSpPr>
-          <p:cNvPr id="4" name="Text 2"/>
-          <p:cNvSpPr/>
-          <p:nvPr/>
-        </p:nvSpPr>
-        <p:spPr>
-          <a:xfrm>
-            <a:off x="822960" y="2103120"/>
+          <p:cNvPr id="5" name="Text 3"/>
+          <p:cNvSpPr/>
+          <p:nvPr/>
+        </p:nvSpPr>
+        <p:spPr>
+          <a:xfrm>
+            <a:off x="822960" y="1554480"/>
             <a:ext cx="9144000" cy="914400"/>
           </a:xfrm>
           <a:prstGeom prst="rect">
@@ -5630,9 +5878,9 @@
               <a:buNone/>
             </a:pPr>
             <a:r>
-              <a:rPr lang="en-US" sz="4800" b="1" dirty="0">
-                <a:solidFill>
-                  <a:srgbClr val="FFFFFF"/>
+              <a:rPr lang="en-US" sz="5000" b="1" dirty="0">
+                <a:solidFill>
+                  <a:srgbClr val="1B2A38"/>
                 </a:solidFill>
                 <a:latin typeface="Cambria" pitchFamily="34" charset="0"/>
                 <a:ea typeface="Cambria" pitchFamily="34" charset="-122"/>
@@ -5640,19 +5888,19 @@
               </a:rPr>
               <a:t>Thank you</a:t>
             </a:r>
-            <a:endParaRPr lang="en-US" sz="4800" dirty="0"/>
-          </a:p>
-        </p:txBody>
-      </p:sp>
-      <p:sp>
-        <p:nvSpPr>
-          <p:cNvPr id="5" name="Text 3"/>
-          <p:cNvSpPr/>
-          <p:nvPr/>
-        </p:nvSpPr>
-        <p:spPr>
-          <a:xfrm>
-            <a:off x="868680" y="3200400"/>
+            <a:endParaRPr lang="en-US" sz="5000" dirty="0"/>
+          </a:p>
+        </p:txBody>
+      </p:sp>
+      <p:sp>
+        <p:nvSpPr>
+          <p:cNvPr id="6" name="Text 4"/>
+          <p:cNvSpPr/>
+          <p:nvPr/>
+        </p:nvSpPr>
+        <p:spPr>
+          <a:xfrm>
+            <a:off x="868680" y="2697480"/>
             <a:ext cx="9601200" cy="548640"/>
           </a:xfrm>
           <a:prstGeom prst="rect">
@@ -5671,7 +5919,7 @@
             <a:r>
               <a:rPr lang="en-US" sz="1800" dirty="0">
                 <a:solidFill>
-                  <a:srgbClr val="CADCEC"/>
+                  <a:srgbClr val="5B6770"/>
                 </a:solidFill>
                 <a:latin typeface="Calibri" pitchFamily="34" charset="0"/>
                 <a:ea typeface="Calibri" pitchFamily="34" charset="-122"/>
@@ -5685,54 +5933,468 @@
       </p:sp>
       <p:sp>
         <p:nvSpPr>
+          <p:cNvPr id="7" name="Text 5"/>
+          <p:cNvSpPr/>
+          <p:nvPr/>
+        </p:nvSpPr>
+        <p:spPr>
+          <a:xfrm>
+            <a:off x="868680" y="3520440"/>
+            <a:ext cx="10058400" cy="365760"/>
+          </a:xfrm>
+          <a:prstGeom prst="rect">
+            <a:avLst/>
+          </a:prstGeom>
+          <a:noFill/>
+          <a:ln/>
+        </p:spPr>
+        <p:txBody>
+          <a:bodyPr wrap="square" lIns="0" tIns="0" rIns="0" bIns="0" rtlCol="0" anchor="ctr"/>
+          <a:lstStyle/>
+          <a:p>
+            <a:pPr indent="0" marL="0">
+              <a:buNone/>
+            </a:pPr>
+            <a:r>
+              <a:rPr lang="en-US" sz="1400" b="1" dirty="0">
+                <a:solidFill>
+                  <a:srgbClr val="00A758"/>
+                </a:solidFill>
+                <a:latin typeface="Calibri" pitchFamily="34" charset="0"/>
+                <a:ea typeface="Calibri" pitchFamily="34" charset="-122"/>
+                <a:cs typeface="Calibri" pitchFamily="34" charset="-120"/>
+              </a:rPr>
+              <a:t>AUROC 0.7803</a:t>
+            </a:r>
+            <a:pPr indent="0" marL="0">
+              <a:buNone/>
+            </a:pPr>
+            <a:r>
+              <a:rPr lang="en-US" sz="1400" dirty="0">
+                <a:solidFill>
+                  <a:srgbClr val="1B2A38"/>
+                </a:solidFill>
+                <a:latin typeface="Calibri" pitchFamily="34" charset="0"/>
+                <a:ea typeface="Calibri" pitchFamily="34" charset="-122"/>
+                <a:cs typeface="Calibri" pitchFamily="34" charset="-120"/>
+              </a:rPr>
+              <a:t>   ·   Streamlit app + GenAI assistant   ·   fully reproducible</a:t>
+            </a:r>
+            <a:endParaRPr lang="en-US" sz="1400" dirty="0"/>
+          </a:p>
+        </p:txBody>
+      </p:sp>
+      <p:sp>
+        <p:nvSpPr>
+          <p:cNvPr id="8" name="Shape 6"/>
+          <p:cNvSpPr/>
+          <p:nvPr/>
+        </p:nvSpPr>
+        <p:spPr>
+          <a:xfrm>
+            <a:off x="914400" y="4206240"/>
+            <a:ext cx="4754880" cy="0"/>
+          </a:xfrm>
+          <a:prstGeom prst="line">
+            <a:avLst/>
+          </a:prstGeom>
+          <a:noFill/>
+          <a:ln w="19050">
+            <a:solidFill>
+              <a:srgbClr val="E7EFF5"/>
+            </a:solidFill>
+            <a:prstDash val="solid"/>
+          </a:ln>
+        </p:spPr>
+      </p:sp>
+      <p:sp>
+        <p:nvSpPr>
+          <p:cNvPr id="9" name="Text 7"/>
+          <p:cNvSpPr/>
+          <p:nvPr/>
+        </p:nvSpPr>
+        <p:spPr>
+          <a:xfrm>
+            <a:off x="914400" y="4389120"/>
+            <a:ext cx="8229600" cy="292608"/>
+          </a:xfrm>
+          <a:prstGeom prst="rect">
+            <a:avLst/>
+          </a:prstGeom>
+          <a:noFill/>
+          <a:ln/>
+        </p:spPr>
+        <p:txBody>
+          <a:bodyPr wrap="square" lIns="0" tIns="0" rIns="0" bIns="0" rtlCol="0" anchor="ctr"/>
+          <a:lstStyle/>
+          <a:p>
+            <a:pPr indent="0" marL="0">
+              <a:buNone/>
+            </a:pPr>
+            <a:r>
+              <a:rPr lang="en-US" sz="1500" dirty="0">
+                <a:solidFill>
+                  <a:srgbClr val="5B6770"/>
+                </a:solidFill>
+                <a:latin typeface="Calibri" pitchFamily="34" charset="0"/>
+                <a:ea typeface="Calibri" pitchFamily="34" charset="-122"/>
+                <a:cs typeface="Calibri" pitchFamily="34" charset="-120"/>
+              </a:rPr>
+              <a:t>Submitted by  </a:t>
+            </a:r>
+            <a:pPr indent="0" marL="0">
+              <a:buNone/>
+            </a:pPr>
+            <a:r>
+              <a:rPr lang="en-US" sz="1500" b="1" dirty="0">
+                <a:solidFill>
+                  <a:srgbClr val="1B2A38"/>
+                </a:solidFill>
+                <a:latin typeface="Calibri" pitchFamily="34" charset="0"/>
+                <a:ea typeface="Calibri" pitchFamily="34" charset="-122"/>
+                <a:cs typeface="Calibri" pitchFamily="34" charset="-120"/>
+              </a:rPr>
+              <a:t>Pavel Daulat Bodle</a:t>
+            </a:r>
+            <a:endParaRPr lang="en-US" sz="1500" dirty="0"/>
+          </a:p>
+        </p:txBody>
+      </p:sp>
+      <p:sp>
+        <p:nvSpPr>
+          <p:cNvPr id="10" name="Text 8"/>
+          <p:cNvSpPr/>
+          <p:nvPr/>
+        </p:nvSpPr>
+        <p:spPr>
+          <a:xfrm>
+            <a:off x="914400" y="4700016"/>
+            <a:ext cx="8229600" cy="274320"/>
+          </a:xfrm>
+          <a:prstGeom prst="rect">
+            <a:avLst/>
+          </a:prstGeom>
+          <a:noFill/>
+          <a:ln/>
+        </p:spPr>
+        <p:txBody>
+          <a:bodyPr wrap="square" lIns="0" tIns="0" rIns="0" bIns="0" rtlCol="0" anchor="ctr"/>
+          <a:lstStyle/>
+          <a:p>
+            <a:pPr indent="0" marL="0">
+              <a:buNone/>
+            </a:pPr>
+            <a:r>
+              <a:rPr lang="en-US" sz="1250" dirty="0">
+                <a:solidFill>
+                  <a:srgbClr val="5B6770"/>
+                </a:solidFill>
+                <a:latin typeface="Calibri" pitchFamily="34" charset="0"/>
+                <a:ea typeface="Calibri" pitchFamily="34" charset="-122"/>
+                <a:cs typeface="Calibri" pitchFamily="34" charset="-120"/>
+              </a:rPr>
+              <a:t>Senior AI Engineer</a:t>
+            </a:r>
+            <a:endParaRPr lang="en-US" sz="1250" dirty="0"/>
+          </a:p>
+        </p:txBody>
+      </p:sp>
+      <p:sp>
+        <p:nvSpPr>
+          <p:cNvPr id="11" name="Text 9"/>
+          <p:cNvSpPr/>
+          <p:nvPr/>
+        </p:nvSpPr>
+        <p:spPr>
+          <a:xfrm>
+            <a:off x="914400" y="5029200"/>
+            <a:ext cx="10515600" cy="274320"/>
+          </a:xfrm>
+          <a:prstGeom prst="rect">
+            <a:avLst/>
+          </a:prstGeom>
+          <a:noFill/>
+          <a:ln/>
+        </p:spPr>
+        <p:txBody>
+          <a:bodyPr wrap="square" lIns="0" tIns="0" rIns="0" bIns="0" rtlCol="0" anchor="ctr"/>
+          <a:lstStyle/>
+          <a:p>
+            <a:pPr indent="0" marL="0">
+              <a:buNone/>
+            </a:pPr>
+            <a:r>
+              <a:rPr lang="en-US" sz="1150" dirty="0">
+                <a:solidFill>
+                  <a:srgbClr val="0090DA"/>
+                </a:solidFill>
+                <a:latin typeface="Calibri" pitchFamily="34" charset="0"/>
+                <a:ea typeface="Calibri" pitchFamily="34" charset="-122"/>
+                <a:cs typeface="Calibri" pitchFamily="34" charset="-120"/>
+              </a:rPr>
+              <a:t>🔗 linkedin.com/in/pavelbodle</a:t>
+            </a:r>
+            <a:pPr indent="0" marL="0">
+              <a:buNone/>
+            </a:pPr>
+            <a:r>
+              <a:rPr lang="en-US" sz="1150" dirty="0">
+                <a:solidFill>
+                  <a:srgbClr val="0090DA"/>
+                </a:solidFill>
+                <a:latin typeface="Calibri" pitchFamily="34" charset="0"/>
+                <a:ea typeface="Calibri" pitchFamily="34" charset="-122"/>
+                <a:cs typeface="Calibri" pitchFamily="34" charset="-120"/>
+              </a:rPr>
+              <a:t>      🐙 github.com/pavelbodle</a:t>
+            </a:r>
+            <a:pPr indent="0" marL="0">
+              <a:buNone/>
+            </a:pPr>
+            <a:r>
+              <a:rPr lang="en-US" sz="1150" dirty="0">
+                <a:solidFill>
+                  <a:srgbClr val="0090DA"/>
+                </a:solidFill>
+                <a:latin typeface="Calibri" pitchFamily="34" charset="0"/>
+                <a:ea typeface="Calibri" pitchFamily="34" charset="-122"/>
+                <a:cs typeface="Calibri" pitchFamily="34" charset="-120"/>
+              </a:rPr>
+              <a:t>      📧 paveliitb@gmail.com</a:t>
+            </a:r>
+            <a:endParaRPr lang="en-US" sz="1150" dirty="0"/>
+          </a:p>
+        </p:txBody>
+      </p:sp>
+      <p:sp>
+        <p:nvSpPr>
+          <p:cNvPr id="12" name="Text 10"/>
+          <p:cNvSpPr/>
+          <p:nvPr/>
+        </p:nvSpPr>
+        <p:spPr>
+          <a:xfrm>
+            <a:off x="868680" y="5989320"/>
+            <a:ext cx="10058400" cy="320040"/>
+          </a:xfrm>
+          <a:prstGeom prst="rect">
+            <a:avLst/>
+          </a:prstGeom>
+          <a:noFill/>
+          <a:ln/>
+        </p:spPr>
+        <p:txBody>
+          <a:bodyPr wrap="square" lIns="0" tIns="0" rIns="0" bIns="0" rtlCol="0" anchor="ctr"/>
+          <a:lstStyle/>
+          <a:p>
+            <a:pPr indent="0" marL="0">
+              <a:buNone/>
+            </a:pPr>
+            <a:r>
+              <a:rPr lang="en-US" sz="1150" i="1" dirty="0">
+                <a:solidFill>
+                  <a:srgbClr val="5B6770"/>
+                </a:solidFill>
+                <a:latin typeface="Calibri" pitchFamily="34" charset="0"/>
+                <a:ea typeface="Calibri" pitchFamily="34" charset="-122"/>
+                <a:cs typeface="Calibri" pitchFamily="34" charset="-120"/>
+              </a:rPr>
+              <a:t>See the appendix for all links (app, repo, documents).</a:t>
+            </a:r>
+            <a:endParaRPr lang="en-US" sz="1150" dirty="0"/>
+          </a:p>
+        </p:txBody>
+      </p:sp>
+    </p:spTree>
+  </p:cSld>
+  <p:clrMapOvr>
+    <a:masterClrMapping/>
+  </p:clrMapOvr>
+</p:sld>
+</file>
+
+<file path=ppt/slides/slide15.xml><?xml version="1.0" encoding="utf-8"?>
+<p:sld xmlns:a="http://schemas.openxmlformats.org/drawingml/2006/main" xmlns:r="http://schemas.openxmlformats.org/officeDocument/2006/relationships" xmlns:p="http://schemas.openxmlformats.org/presentationml/2006/main">
+  <p:cSld name="Slide 15">
+    <p:bg>
+      <p:bgPr>
+        <a:solidFill>
+          <a:srgbClr val="F4F8FB"/>
+        </a:solidFill>
+      </p:bgPr>
+    </p:bg>
+    <p:spTree>
+      <p:nvGrpSpPr>
+        <p:cNvPr id="1" name=""/>
+        <p:cNvGrpSpPr/>
+        <p:nvPr/>
+      </p:nvGrpSpPr>
+      <p:grpSpPr>
+        <a:xfrm>
+          <a:off x="0" y="0"/>
+          <a:ext cx="0" cy="0"/>
+          <a:chOff x="0" y="0"/>
+          <a:chExt cx="0" cy="0"/>
+        </a:xfrm>
+      </p:grpSpPr>
+      <p:sp>
+        <p:nvSpPr>
+          <p:cNvPr id="2" name="Text 0"/>
+          <p:cNvSpPr/>
+          <p:nvPr/>
+        </p:nvSpPr>
+        <p:spPr>
+          <a:xfrm>
+            <a:off x="548640" y="457200"/>
+            <a:ext cx="7315200" cy="274320"/>
+          </a:xfrm>
+          <a:prstGeom prst="rect">
+            <a:avLst/>
+          </a:prstGeom>
+          <a:noFill/>
+          <a:ln/>
+        </p:spPr>
+        <p:txBody>
+          <a:bodyPr wrap="square" lIns="0" tIns="0" rIns="0" bIns="0" rtlCol="0" anchor="ctr"/>
+          <a:lstStyle/>
+          <a:p>
+            <a:pPr indent="0" marL="0">
+              <a:buNone/>
+            </a:pPr>
+            <a:r>
+              <a:rPr lang="en-US" sz="1200" b="1" spc="200" kern="0" dirty="0">
+                <a:solidFill>
+                  <a:srgbClr val="0090DA"/>
+                </a:solidFill>
+                <a:latin typeface="Calibri" pitchFamily="34" charset="0"/>
+                <a:ea typeface="Calibri" pitchFamily="34" charset="-122"/>
+                <a:cs typeface="Calibri" pitchFamily="34" charset="-120"/>
+              </a:rPr>
+              <a:t>APPENDIX</a:t>
+            </a:r>
+            <a:endParaRPr lang="en-US" sz="1200" dirty="0"/>
+          </a:p>
+        </p:txBody>
+      </p:sp>
+      <p:sp>
+        <p:nvSpPr>
+          <p:cNvPr id="3" name="Text 1"/>
+          <p:cNvSpPr/>
+          <p:nvPr/>
+        </p:nvSpPr>
+        <p:spPr>
+          <a:xfrm>
+            <a:off x="548640" y="777240"/>
+            <a:ext cx="10972800" cy="822960"/>
+          </a:xfrm>
+          <a:prstGeom prst="rect">
+            <a:avLst/>
+          </a:prstGeom>
+          <a:noFill/>
+          <a:ln/>
+        </p:spPr>
+        <p:txBody>
+          <a:bodyPr wrap="square" lIns="0" tIns="0" rIns="0" bIns="0" rtlCol="0" anchor="ctr"/>
+          <a:lstStyle/>
+          <a:p>
+            <a:pPr indent="0" marL="0">
+              <a:buNone/>
+            </a:pPr>
+            <a:r>
+              <a:rPr lang="en-US" sz="3200" b="1" dirty="0">
+                <a:solidFill>
+                  <a:srgbClr val="1B2A38"/>
+                </a:solidFill>
+                <a:latin typeface="Cambria" pitchFamily="34" charset="0"/>
+                <a:ea typeface="Cambria" pitchFamily="34" charset="-122"/>
+                <a:cs typeface="Cambria" pitchFamily="34" charset="-120"/>
+              </a:rPr>
+              <a:t>Links &amp; deliverables</a:t>
+            </a:r>
+            <a:endParaRPr lang="en-US" sz="3200" dirty="0"/>
+          </a:p>
+        </p:txBody>
+      </p:sp>
+      <p:sp>
+        <p:nvSpPr>
+          <p:cNvPr id="4" name="Shape 2"/>
+          <p:cNvSpPr/>
+          <p:nvPr/>
+        </p:nvSpPr>
+        <p:spPr>
+          <a:xfrm>
+            <a:off x="548640" y="1783080"/>
+            <a:ext cx="11109960" cy="603504"/>
+          </a:xfrm>
+          <a:prstGeom prst="roundRect">
+            <a:avLst>
+              <a:gd name="adj" fmla="val 9091"/>
+            </a:avLst>
+          </a:prstGeom>
+          <a:solidFill>
+            <a:srgbClr val="FFFFFF"/>
+          </a:solidFill>
+          <a:ln w="12700">
+            <a:solidFill>
+              <a:srgbClr val="E7EFF5"/>
+            </a:solidFill>
+            <a:prstDash val="solid"/>
+          </a:ln>
+        </p:spPr>
+      </p:sp>
+      <p:sp>
+        <p:nvSpPr>
+          <p:cNvPr id="5" name="Shape 3"/>
+          <p:cNvSpPr/>
+          <p:nvPr/>
+        </p:nvSpPr>
+        <p:spPr>
+          <a:xfrm>
+            <a:off x="713232" y="1901952"/>
+            <a:ext cx="365760" cy="365760"/>
+          </a:xfrm>
+          <a:prstGeom prst="ellipse">
+            <a:avLst/>
+          </a:prstGeom>
+          <a:solidFill>
+            <a:srgbClr val="0090DA"/>
+          </a:solidFill>
+          <a:ln/>
+        </p:spPr>
+      </p:sp>
+      <p:sp>
+        <p:nvSpPr>
           <p:cNvPr id="6" name="Text 4"/>
           <p:cNvSpPr/>
           <p:nvPr/>
         </p:nvSpPr>
         <p:spPr>
           <a:xfrm>
-            <a:off x="868680" y="4114800"/>
-            <a:ext cx="10058400" cy="365760"/>
-          </a:xfrm>
-          <a:prstGeom prst="rect">
-            <a:avLst/>
-          </a:prstGeom>
-          <a:noFill/>
-          <a:ln/>
-        </p:spPr>
-        <p:txBody>
-          <a:bodyPr wrap="square" lIns="0" tIns="0" rIns="0" bIns="0" rtlCol="0" anchor="ctr"/>
-          <a:lstStyle/>
-          <a:p>
-            <a:pPr indent="0" marL="0">
-              <a:buNone/>
-            </a:pPr>
-            <a:r>
-              <a:rPr lang="en-US" sz="1400" b="1" dirty="0">
-                <a:solidFill>
-                  <a:srgbClr val="00A758"/>
-                </a:solidFill>
-                <a:latin typeface="Calibri" pitchFamily="34" charset="0"/>
-                <a:ea typeface="Calibri" pitchFamily="34" charset="-122"/>
-                <a:cs typeface="Calibri" pitchFamily="34" charset="-120"/>
-              </a:rPr>
-              <a:t>AUROC 0.7803</a:t>
-            </a:r>
-            <a:pPr indent="0" marL="0">
-              <a:buNone/>
-            </a:pPr>
-            <a:r>
-              <a:rPr lang="en-US" sz="1400" dirty="0">
-                <a:solidFill>
-                  <a:srgbClr val="CADCEC"/>
-                </a:solidFill>
-                <a:latin typeface="Calibri" pitchFamily="34" charset="0"/>
-                <a:ea typeface="Calibri" pitchFamily="34" charset="-122"/>
-                <a:cs typeface="Calibri" pitchFamily="34" charset="-120"/>
-              </a:rPr>
-              <a:t>   ·   Streamlit app + GenAI assistant   ·   fully reproducible</a:t>
-            </a:r>
-            <a:endParaRPr lang="en-US" sz="1400" dirty="0"/>
+            <a:off x="713232" y="1901952"/>
+            <a:ext cx="365760" cy="365760"/>
+          </a:xfrm>
+          <a:prstGeom prst="rect">
+            <a:avLst/>
+          </a:prstGeom>
+          <a:noFill/>
+          <a:ln/>
+        </p:spPr>
+        <p:txBody>
+          <a:bodyPr wrap="square" lIns="0" tIns="0" rIns="0" bIns="0" rtlCol="0" anchor="ctr"/>
+          <a:lstStyle/>
+          <a:p>
+            <a:pPr algn="ctr" indent="0" marL="0">
+              <a:buNone/>
+            </a:pPr>
+            <a:r>
+              <a:rPr lang="en-US" sz="1300" dirty="0">
+                <a:solidFill>
+                  <a:srgbClr val="000000"/>
+                </a:solidFill>
+              </a:rPr>
+              <a:t>🚀</a:t>
+            </a:r>
+            <a:endParaRPr lang="en-US" sz="1300" dirty="0"/>
           </a:p>
         </p:txBody>
       </p:sp>
@@ -5744,34 +6406,1078 @@
         </p:nvSpPr>
         <p:spPr>
           <a:xfrm>
-            <a:off x="868680" y="5852160"/>
-            <a:ext cx="10058400" cy="365760"/>
-          </a:xfrm>
-          <a:prstGeom prst="rect">
-            <a:avLst/>
-          </a:prstGeom>
-          <a:noFill/>
-          <a:ln/>
-        </p:spPr>
-        <p:txBody>
-          <a:bodyPr wrap="square" lIns="0" tIns="0" rIns="0" bIns="0" rtlCol="0" anchor="ctr"/>
-          <a:lstStyle/>
-          <a:p>
-            <a:pPr indent="0" marL="0">
-              <a:buNone/>
-            </a:pPr>
-            <a:r>
-              <a:rPr lang="en-US" sz="1200" i="1" dirty="0">
-                <a:solidFill>
-                  <a:srgbClr val="8FA6B8"/>
-                </a:solidFill>
-                <a:latin typeface="Calibri" pitchFamily="34" charset="0"/>
-                <a:ea typeface="Calibri" pitchFamily="34" charset="-122"/>
-                <a:cs typeface="Calibri" pitchFamily="34" charset="-120"/>
-              </a:rPr>
-              <a:t>Deliverables:  MetLife_Answers.docx  ·  this deck  ·  app.py + analysis.py</a:t>
-            </a:r>
-            <a:endParaRPr lang="en-US" sz="1200" dirty="0"/>
+            <a:off x="1280160" y="1783080"/>
+            <a:ext cx="3931920" cy="603504"/>
+          </a:xfrm>
+          <a:prstGeom prst="rect">
+            <a:avLst/>
+          </a:prstGeom>
+          <a:noFill/>
+          <a:ln/>
+        </p:spPr>
+        <p:txBody>
+          <a:bodyPr wrap="square" lIns="0" tIns="0" rIns="0" bIns="0" rtlCol="0" anchor="ctr"/>
+          <a:lstStyle/>
+          <a:p>
+            <a:pPr indent="0" marL="0">
+              <a:buNone/>
+            </a:pPr>
+            <a:r>
+              <a:rPr lang="en-US" sz="1350" b="1" dirty="0">
+                <a:solidFill>
+                  <a:srgbClr val="1B2A38"/>
+                </a:solidFill>
+                <a:latin typeface="Calibri" pitchFamily="34" charset="0"/>
+                <a:ea typeface="Calibri" pitchFamily="34" charset="-122"/>
+                <a:cs typeface="Calibri" pitchFamily="34" charset="-120"/>
+              </a:rPr>
+              <a:t>Live app (Streamlit Cloud)</a:t>
+            </a:r>
+            <a:endParaRPr lang="en-US" sz="1350" dirty="0"/>
+          </a:p>
+        </p:txBody>
+      </p:sp>
+      <p:sp>
+        <p:nvSpPr>
+          <p:cNvPr id="8" name="Text 6"/>
+          <p:cNvSpPr/>
+          <p:nvPr/>
+        </p:nvSpPr>
+        <p:spPr>
+          <a:xfrm>
+            <a:off x="5303520" y="1783080"/>
+            <a:ext cx="6126480" cy="603504"/>
+          </a:xfrm>
+          <a:prstGeom prst="rect">
+            <a:avLst/>
+          </a:prstGeom>
+          <a:noFill/>
+          <a:ln/>
+        </p:spPr>
+        <p:txBody>
+          <a:bodyPr wrap="square" lIns="0" tIns="0" rIns="0" bIns="0" rtlCol="0" anchor="ctr"/>
+          <a:lstStyle/>
+          <a:p>
+            <a:pPr indent="0" marL="0">
+              <a:buNone/>
+            </a:pPr>
+            <a:r>
+              <a:rPr lang="en-US" sz="1250" dirty="0">
+                <a:solidFill>
+                  <a:srgbClr val="0090DA"/>
+                </a:solidFill>
+                <a:latin typeface="Calibri" pitchFamily="34" charset="0"/>
+                <a:ea typeface="Calibri" pitchFamily="34" charset="-122"/>
+                <a:cs typeface="Calibri" pitchFamily="34" charset="-120"/>
+              </a:rPr>
+              <a:t>‹ paste your deployed app URL here ›</a:t>
+            </a:r>
+            <a:endParaRPr lang="en-US" sz="1250" dirty="0"/>
+          </a:p>
+        </p:txBody>
+      </p:sp>
+      <p:sp>
+        <p:nvSpPr>
+          <p:cNvPr id="9" name="Shape 7"/>
+          <p:cNvSpPr/>
+          <p:nvPr/>
+        </p:nvSpPr>
+        <p:spPr>
+          <a:xfrm>
+            <a:off x="548640" y="2459736"/>
+            <a:ext cx="11109960" cy="603504"/>
+          </a:xfrm>
+          <a:prstGeom prst="roundRect">
+            <a:avLst>
+              <a:gd name="adj" fmla="val 9091"/>
+            </a:avLst>
+          </a:prstGeom>
+          <a:solidFill>
+            <a:srgbClr val="FFFFFF"/>
+          </a:solidFill>
+          <a:ln w="12700">
+            <a:solidFill>
+              <a:srgbClr val="E7EFF5"/>
+            </a:solidFill>
+            <a:prstDash val="solid"/>
+          </a:ln>
+        </p:spPr>
+      </p:sp>
+      <p:sp>
+        <p:nvSpPr>
+          <p:cNvPr id="10" name="Shape 8"/>
+          <p:cNvSpPr/>
+          <p:nvPr/>
+        </p:nvSpPr>
+        <p:spPr>
+          <a:xfrm>
+            <a:off x="713232" y="2578608"/>
+            <a:ext cx="365760" cy="365760"/>
+          </a:xfrm>
+          <a:prstGeom prst="ellipse">
+            <a:avLst/>
+          </a:prstGeom>
+          <a:solidFill>
+            <a:srgbClr val="1B2A38"/>
+          </a:solidFill>
+          <a:ln/>
+        </p:spPr>
+      </p:sp>
+      <p:sp>
+        <p:nvSpPr>
+          <p:cNvPr id="11" name="Text 9"/>
+          <p:cNvSpPr/>
+          <p:nvPr/>
+        </p:nvSpPr>
+        <p:spPr>
+          <a:xfrm>
+            <a:off x="713232" y="2578608"/>
+            <a:ext cx="365760" cy="365760"/>
+          </a:xfrm>
+          <a:prstGeom prst="rect">
+            <a:avLst/>
+          </a:prstGeom>
+          <a:noFill/>
+          <a:ln/>
+        </p:spPr>
+        <p:txBody>
+          <a:bodyPr wrap="square" lIns="0" tIns="0" rIns="0" bIns="0" rtlCol="0" anchor="ctr"/>
+          <a:lstStyle/>
+          <a:p>
+            <a:pPr algn="ctr" indent="0" marL="0">
+              <a:buNone/>
+            </a:pPr>
+            <a:r>
+              <a:rPr lang="en-US" sz="1300" dirty="0">
+                <a:solidFill>
+                  <a:srgbClr val="000000"/>
+                </a:solidFill>
+              </a:rPr>
+              <a:t>💻</a:t>
+            </a:r>
+            <a:endParaRPr lang="en-US" sz="1300" dirty="0"/>
+          </a:p>
+        </p:txBody>
+      </p:sp>
+      <p:sp>
+        <p:nvSpPr>
+          <p:cNvPr id="12" name="Text 10"/>
+          <p:cNvSpPr/>
+          <p:nvPr/>
+        </p:nvSpPr>
+        <p:spPr>
+          <a:xfrm>
+            <a:off x="1280160" y="2459736"/>
+            <a:ext cx="3931920" cy="603504"/>
+          </a:xfrm>
+          <a:prstGeom prst="rect">
+            <a:avLst/>
+          </a:prstGeom>
+          <a:noFill/>
+          <a:ln/>
+        </p:spPr>
+        <p:txBody>
+          <a:bodyPr wrap="square" lIns="0" tIns="0" rIns="0" bIns="0" rtlCol="0" anchor="ctr"/>
+          <a:lstStyle/>
+          <a:p>
+            <a:pPr indent="0" marL="0">
+              <a:buNone/>
+            </a:pPr>
+            <a:r>
+              <a:rPr lang="en-US" sz="1350" b="1" dirty="0">
+                <a:solidFill>
+                  <a:srgbClr val="1B2A38"/>
+                </a:solidFill>
+                <a:latin typeface="Calibri" pitchFamily="34" charset="0"/>
+                <a:ea typeface="Calibri" pitchFamily="34" charset="-122"/>
+                <a:cs typeface="Calibri" pitchFamily="34" charset="-120"/>
+              </a:rPr>
+              <a:t>GitHub repository</a:t>
+            </a:r>
+            <a:endParaRPr lang="en-US" sz="1350" dirty="0"/>
+          </a:p>
+        </p:txBody>
+      </p:sp>
+      <p:sp>
+        <p:nvSpPr>
+          <p:cNvPr id="13" name="Text 11"/>
+          <p:cNvSpPr/>
+          <p:nvPr/>
+        </p:nvSpPr>
+        <p:spPr>
+          <a:xfrm>
+            <a:off x="5303520" y="2459736"/>
+            <a:ext cx="6126480" cy="603504"/>
+          </a:xfrm>
+          <a:prstGeom prst="rect">
+            <a:avLst/>
+          </a:prstGeom>
+          <a:noFill/>
+          <a:ln/>
+        </p:spPr>
+        <p:txBody>
+          <a:bodyPr wrap="square" lIns="0" tIns="0" rIns="0" bIns="0" rtlCol="0" anchor="ctr"/>
+          <a:lstStyle/>
+          <a:p>
+            <a:pPr indent="0" marL="0">
+              <a:buNone/>
+            </a:pPr>
+            <a:r>
+              <a:rPr lang="en-US" sz="1250" dirty="0">
+                <a:solidFill>
+                  <a:srgbClr val="0090DA"/>
+                </a:solidFill>
+                <a:latin typeface="Calibri" pitchFamily="34" charset="0"/>
+                <a:ea typeface="Calibri" pitchFamily="34" charset="-122"/>
+                <a:cs typeface="Calibri" pitchFamily="34" charset="-120"/>
+              </a:rPr>
+              <a:t>github.com/PavelBodle/metlife-high-risk-app</a:t>
+            </a:r>
+            <a:endParaRPr lang="en-US" sz="1250" dirty="0"/>
+          </a:p>
+        </p:txBody>
+      </p:sp>
+      <p:sp>
+        <p:nvSpPr>
+          <p:cNvPr id="14" name="Shape 12"/>
+          <p:cNvSpPr/>
+          <p:nvPr/>
+        </p:nvSpPr>
+        <p:spPr>
+          <a:xfrm>
+            <a:off x="548640" y="3136392"/>
+            <a:ext cx="11109960" cy="603504"/>
+          </a:xfrm>
+          <a:prstGeom prst="roundRect">
+            <a:avLst>
+              <a:gd name="adj" fmla="val 9091"/>
+            </a:avLst>
+          </a:prstGeom>
+          <a:solidFill>
+            <a:srgbClr val="FFFFFF"/>
+          </a:solidFill>
+          <a:ln w="12700">
+            <a:solidFill>
+              <a:srgbClr val="E7EFF5"/>
+            </a:solidFill>
+            <a:prstDash val="solid"/>
+          </a:ln>
+        </p:spPr>
+      </p:sp>
+      <p:sp>
+        <p:nvSpPr>
+          <p:cNvPr id="15" name="Shape 13"/>
+          <p:cNvSpPr/>
+          <p:nvPr/>
+        </p:nvSpPr>
+        <p:spPr>
+          <a:xfrm>
+            <a:off x="713232" y="3255264"/>
+            <a:ext cx="365760" cy="365760"/>
+          </a:xfrm>
+          <a:prstGeom prst="ellipse">
+            <a:avLst/>
+          </a:prstGeom>
+          <a:solidFill>
+            <a:srgbClr val="00A758"/>
+          </a:solidFill>
+          <a:ln/>
+        </p:spPr>
+      </p:sp>
+      <p:sp>
+        <p:nvSpPr>
+          <p:cNvPr id="16" name="Text 14"/>
+          <p:cNvSpPr/>
+          <p:nvPr/>
+        </p:nvSpPr>
+        <p:spPr>
+          <a:xfrm>
+            <a:off x="713232" y="3255264"/>
+            <a:ext cx="365760" cy="365760"/>
+          </a:xfrm>
+          <a:prstGeom prst="rect">
+            <a:avLst/>
+          </a:prstGeom>
+          <a:noFill/>
+          <a:ln/>
+        </p:spPr>
+        <p:txBody>
+          <a:bodyPr wrap="square" lIns="0" tIns="0" rIns="0" bIns="0" rtlCol="0" anchor="ctr"/>
+          <a:lstStyle/>
+          <a:p>
+            <a:pPr algn="ctr" indent="0" marL="0">
+              <a:buNone/>
+            </a:pPr>
+            <a:r>
+              <a:rPr lang="en-US" sz="1300" dirty="0">
+                <a:solidFill>
+                  <a:srgbClr val="000000"/>
+                </a:solidFill>
+              </a:rPr>
+              <a:t>📄</a:t>
+            </a:r>
+            <a:endParaRPr lang="en-US" sz="1300" dirty="0"/>
+          </a:p>
+        </p:txBody>
+      </p:sp>
+      <p:sp>
+        <p:nvSpPr>
+          <p:cNvPr id="17" name="Text 15"/>
+          <p:cNvSpPr/>
+          <p:nvPr/>
+        </p:nvSpPr>
+        <p:spPr>
+          <a:xfrm>
+            <a:off x="1280160" y="3136392"/>
+            <a:ext cx="3931920" cy="603504"/>
+          </a:xfrm>
+          <a:prstGeom prst="rect">
+            <a:avLst/>
+          </a:prstGeom>
+          <a:noFill/>
+          <a:ln/>
+        </p:spPr>
+        <p:txBody>
+          <a:bodyPr wrap="square" lIns="0" tIns="0" rIns="0" bIns="0" rtlCol="0" anchor="ctr"/>
+          <a:lstStyle/>
+          <a:p>
+            <a:pPr indent="0" marL="0">
+              <a:buNone/>
+            </a:pPr>
+            <a:r>
+              <a:rPr lang="en-US" sz="1350" b="1" dirty="0">
+                <a:solidFill>
+                  <a:srgbClr val="1B2A38"/>
+                </a:solidFill>
+                <a:latin typeface="Calibri" pitchFamily="34" charset="0"/>
+                <a:ea typeface="Calibri" pitchFamily="34" charset="-122"/>
+                <a:cs typeface="Calibri" pitchFamily="34" charset="-120"/>
+              </a:rPr>
+              <a:t>Answers document (Q1–Q4)</a:t>
+            </a:r>
+            <a:endParaRPr lang="en-US" sz="1350" dirty="0"/>
+          </a:p>
+        </p:txBody>
+      </p:sp>
+      <p:sp>
+        <p:nvSpPr>
+          <p:cNvPr id="18" name="Text 16"/>
+          <p:cNvSpPr/>
+          <p:nvPr/>
+        </p:nvSpPr>
+        <p:spPr>
+          <a:xfrm>
+            <a:off x="5303520" y="3136392"/>
+            <a:ext cx="6126480" cy="603504"/>
+          </a:xfrm>
+          <a:prstGeom prst="rect">
+            <a:avLst/>
+          </a:prstGeom>
+          <a:noFill/>
+          <a:ln/>
+        </p:spPr>
+        <p:txBody>
+          <a:bodyPr wrap="square" lIns="0" tIns="0" rIns="0" bIns="0" rtlCol="0" anchor="ctr"/>
+          <a:lstStyle/>
+          <a:p>
+            <a:pPr indent="0" marL="0">
+              <a:buNone/>
+            </a:pPr>
+            <a:r>
+              <a:rPr lang="en-US" sz="1250" dirty="0">
+                <a:solidFill>
+                  <a:srgbClr val="0090DA"/>
+                </a:solidFill>
+                <a:latin typeface="Calibri" pitchFamily="34" charset="0"/>
+                <a:ea typeface="Calibri" pitchFamily="34" charset="-122"/>
+                <a:cs typeface="Calibri" pitchFamily="34" charset="-120"/>
+              </a:rPr>
+              <a:t>‹ link or attached file ›</a:t>
+            </a:r>
+            <a:endParaRPr lang="en-US" sz="1250" dirty="0"/>
+          </a:p>
+        </p:txBody>
+      </p:sp>
+      <p:sp>
+        <p:nvSpPr>
+          <p:cNvPr id="19" name="Shape 17"/>
+          <p:cNvSpPr/>
+          <p:nvPr/>
+        </p:nvSpPr>
+        <p:spPr>
+          <a:xfrm>
+            <a:off x="548640" y="3813048"/>
+            <a:ext cx="11109960" cy="603504"/>
+          </a:xfrm>
+          <a:prstGeom prst="roundRect">
+            <a:avLst>
+              <a:gd name="adj" fmla="val 9091"/>
+            </a:avLst>
+          </a:prstGeom>
+          <a:solidFill>
+            <a:srgbClr val="FFFFFF"/>
+          </a:solidFill>
+          <a:ln w="12700">
+            <a:solidFill>
+              <a:srgbClr val="E7EFF5"/>
+            </a:solidFill>
+            <a:prstDash val="solid"/>
+          </a:ln>
+        </p:spPr>
+      </p:sp>
+      <p:sp>
+        <p:nvSpPr>
+          <p:cNvPr id="20" name="Shape 18"/>
+          <p:cNvSpPr/>
+          <p:nvPr/>
+        </p:nvSpPr>
+        <p:spPr>
+          <a:xfrm>
+            <a:off x="713232" y="3931920"/>
+            <a:ext cx="365760" cy="365760"/>
+          </a:xfrm>
+          <a:prstGeom prst="ellipse">
+            <a:avLst/>
+          </a:prstGeom>
+          <a:solidFill>
+            <a:srgbClr val="0090DA"/>
+          </a:solidFill>
+          <a:ln/>
+        </p:spPr>
+      </p:sp>
+      <p:sp>
+        <p:nvSpPr>
+          <p:cNvPr id="21" name="Text 19"/>
+          <p:cNvSpPr/>
+          <p:nvPr/>
+        </p:nvSpPr>
+        <p:spPr>
+          <a:xfrm>
+            <a:off x="713232" y="3931920"/>
+            <a:ext cx="365760" cy="365760"/>
+          </a:xfrm>
+          <a:prstGeom prst="rect">
+            <a:avLst/>
+          </a:prstGeom>
+          <a:noFill/>
+          <a:ln/>
+        </p:spPr>
+        <p:txBody>
+          <a:bodyPr wrap="square" lIns="0" tIns="0" rIns="0" bIns="0" rtlCol="0" anchor="ctr"/>
+          <a:lstStyle/>
+          <a:p>
+            <a:pPr algn="ctr" indent="0" marL="0">
+              <a:buNone/>
+            </a:pPr>
+            <a:r>
+              <a:rPr lang="en-US" sz="1300" dirty="0">
+                <a:solidFill>
+                  <a:srgbClr val="000000"/>
+                </a:solidFill>
+              </a:rPr>
+              <a:t>🖥️</a:t>
+            </a:r>
+            <a:endParaRPr lang="en-US" sz="1300" dirty="0"/>
+          </a:p>
+        </p:txBody>
+      </p:sp>
+      <p:sp>
+        <p:nvSpPr>
+          <p:cNvPr id="22" name="Text 20"/>
+          <p:cNvSpPr/>
+          <p:nvPr/>
+        </p:nvSpPr>
+        <p:spPr>
+          <a:xfrm>
+            <a:off x="1280160" y="3813048"/>
+            <a:ext cx="3931920" cy="603504"/>
+          </a:xfrm>
+          <a:prstGeom prst="rect">
+            <a:avLst/>
+          </a:prstGeom>
+          <a:noFill/>
+          <a:ln/>
+        </p:spPr>
+        <p:txBody>
+          <a:bodyPr wrap="square" lIns="0" tIns="0" rIns="0" bIns="0" rtlCol="0" anchor="ctr"/>
+          <a:lstStyle/>
+          <a:p>
+            <a:pPr indent="0" marL="0">
+              <a:buNone/>
+            </a:pPr>
+            <a:r>
+              <a:rPr lang="en-US" sz="1350" b="1" dirty="0">
+                <a:solidFill>
+                  <a:srgbClr val="1B2A38"/>
+                </a:solidFill>
+                <a:latin typeface="Calibri" pitchFamily="34" charset="0"/>
+                <a:ea typeface="Calibri" pitchFamily="34" charset="-122"/>
+                <a:cs typeface="Calibri" pitchFamily="34" charset="-120"/>
+              </a:rPr>
+              <a:t>Insights deck (this file)</a:t>
+            </a:r>
+            <a:endParaRPr lang="en-US" sz="1350" dirty="0"/>
+          </a:p>
+        </p:txBody>
+      </p:sp>
+      <p:sp>
+        <p:nvSpPr>
+          <p:cNvPr id="23" name="Text 21"/>
+          <p:cNvSpPr/>
+          <p:nvPr/>
+        </p:nvSpPr>
+        <p:spPr>
+          <a:xfrm>
+            <a:off x="5303520" y="3813048"/>
+            <a:ext cx="6126480" cy="603504"/>
+          </a:xfrm>
+          <a:prstGeom prst="rect">
+            <a:avLst/>
+          </a:prstGeom>
+          <a:noFill/>
+          <a:ln/>
+        </p:spPr>
+        <p:txBody>
+          <a:bodyPr wrap="square" lIns="0" tIns="0" rIns="0" bIns="0" rtlCol="0" anchor="ctr"/>
+          <a:lstStyle/>
+          <a:p>
+            <a:pPr indent="0" marL="0">
+              <a:buNone/>
+            </a:pPr>
+            <a:r>
+              <a:rPr lang="en-US" sz="1250" dirty="0">
+                <a:solidFill>
+                  <a:srgbClr val="0090DA"/>
+                </a:solidFill>
+                <a:latin typeface="Calibri" pitchFamily="34" charset="0"/>
+                <a:ea typeface="Calibri" pitchFamily="34" charset="-122"/>
+                <a:cs typeface="Calibri" pitchFamily="34" charset="-120"/>
+              </a:rPr>
+              <a:t>‹ link or attached file ›</a:t>
+            </a:r>
+            <a:endParaRPr lang="en-US" sz="1250" dirty="0"/>
+          </a:p>
+        </p:txBody>
+      </p:sp>
+      <p:sp>
+        <p:nvSpPr>
+          <p:cNvPr id="24" name="Shape 22"/>
+          <p:cNvSpPr/>
+          <p:nvPr/>
+        </p:nvSpPr>
+        <p:spPr>
+          <a:xfrm>
+            <a:off x="548640" y="4489704"/>
+            <a:ext cx="11109960" cy="603504"/>
+          </a:xfrm>
+          <a:prstGeom prst="roundRect">
+            <a:avLst>
+              <a:gd name="adj" fmla="val 9091"/>
+            </a:avLst>
+          </a:prstGeom>
+          <a:solidFill>
+            <a:srgbClr val="FFFFFF"/>
+          </a:solidFill>
+          <a:ln w="12700">
+            <a:solidFill>
+              <a:srgbClr val="E7EFF5"/>
+            </a:solidFill>
+            <a:prstDash val="solid"/>
+          </a:ln>
+        </p:spPr>
+      </p:sp>
+      <p:sp>
+        <p:nvSpPr>
+          <p:cNvPr id="25" name="Shape 23"/>
+          <p:cNvSpPr/>
+          <p:nvPr/>
+        </p:nvSpPr>
+        <p:spPr>
+          <a:xfrm>
+            <a:off x="713232" y="4608576"/>
+            <a:ext cx="365760" cy="365760"/>
+          </a:xfrm>
+          <a:prstGeom prst="ellipse">
+            <a:avLst/>
+          </a:prstGeom>
+          <a:solidFill>
+            <a:srgbClr val="12283A"/>
+          </a:solidFill>
+          <a:ln/>
+        </p:spPr>
+      </p:sp>
+      <p:sp>
+        <p:nvSpPr>
+          <p:cNvPr id="26" name="Text 24"/>
+          <p:cNvSpPr/>
+          <p:nvPr/>
+        </p:nvSpPr>
+        <p:spPr>
+          <a:xfrm>
+            <a:off x="713232" y="4608576"/>
+            <a:ext cx="365760" cy="365760"/>
+          </a:xfrm>
+          <a:prstGeom prst="rect">
+            <a:avLst/>
+          </a:prstGeom>
+          <a:noFill/>
+          <a:ln/>
+        </p:spPr>
+        <p:txBody>
+          <a:bodyPr wrap="square" lIns="0" tIns="0" rIns="0" bIns="0" rtlCol="0" anchor="ctr"/>
+          <a:lstStyle/>
+          <a:p>
+            <a:pPr algn="ctr" indent="0" marL="0">
+              <a:buNone/>
+            </a:pPr>
+            <a:r>
+              <a:rPr lang="en-US" sz="1300" dirty="0">
+                <a:solidFill>
+                  <a:srgbClr val="000000"/>
+                </a:solidFill>
+              </a:rPr>
+              <a:t>📚</a:t>
+            </a:r>
+            <a:endParaRPr lang="en-US" sz="1300" dirty="0"/>
+          </a:p>
+        </p:txBody>
+      </p:sp>
+      <p:sp>
+        <p:nvSpPr>
+          <p:cNvPr id="27" name="Text 25"/>
+          <p:cNvSpPr/>
+          <p:nvPr/>
+        </p:nvSpPr>
+        <p:spPr>
+          <a:xfrm>
+            <a:off x="1280160" y="4489704"/>
+            <a:ext cx="3931920" cy="603504"/>
+          </a:xfrm>
+          <a:prstGeom prst="rect">
+            <a:avLst/>
+          </a:prstGeom>
+          <a:noFill/>
+          <a:ln/>
+        </p:spPr>
+        <p:txBody>
+          <a:bodyPr wrap="square" lIns="0" tIns="0" rIns="0" bIns="0" rtlCol="0" anchor="ctr"/>
+          <a:lstStyle/>
+          <a:p>
+            <a:pPr indent="0" marL="0">
+              <a:buNone/>
+            </a:pPr>
+            <a:r>
+              <a:rPr lang="en-US" sz="1350" b="1" dirty="0">
+                <a:solidFill>
+                  <a:srgbClr val="1B2A38"/>
+                </a:solidFill>
+                <a:latin typeface="Calibri" pitchFamily="34" charset="0"/>
+                <a:ea typeface="Calibri" pitchFamily="34" charset="-122"/>
+                <a:cs typeface="Calibri" pitchFamily="34" charset="-120"/>
+              </a:rPr>
+              <a:t>Technical / interview guide</a:t>
+            </a:r>
+            <a:endParaRPr lang="en-US" sz="1350" dirty="0"/>
+          </a:p>
+        </p:txBody>
+      </p:sp>
+      <p:sp>
+        <p:nvSpPr>
+          <p:cNvPr id="28" name="Text 26"/>
+          <p:cNvSpPr/>
+          <p:nvPr/>
+        </p:nvSpPr>
+        <p:spPr>
+          <a:xfrm>
+            <a:off x="5303520" y="4489704"/>
+            <a:ext cx="6126480" cy="603504"/>
+          </a:xfrm>
+          <a:prstGeom prst="rect">
+            <a:avLst/>
+          </a:prstGeom>
+          <a:noFill/>
+          <a:ln/>
+        </p:spPr>
+        <p:txBody>
+          <a:bodyPr wrap="square" lIns="0" tIns="0" rIns="0" bIns="0" rtlCol="0" anchor="ctr"/>
+          <a:lstStyle/>
+          <a:p>
+            <a:pPr indent="0" marL="0">
+              <a:buNone/>
+            </a:pPr>
+            <a:r>
+              <a:rPr lang="en-US" sz="1250" dirty="0">
+                <a:solidFill>
+                  <a:srgbClr val="0090DA"/>
+                </a:solidFill>
+                <a:latin typeface="Calibri" pitchFamily="34" charset="0"/>
+                <a:ea typeface="Calibri" pitchFamily="34" charset="-122"/>
+                <a:cs typeface="Calibri" pitchFamily="34" charset="-120"/>
+              </a:rPr>
+              <a:t>‹ link or attached file ›</a:t>
+            </a:r>
+            <a:endParaRPr lang="en-US" sz="1250" dirty="0"/>
+          </a:p>
+        </p:txBody>
+      </p:sp>
+      <p:sp>
+        <p:nvSpPr>
+          <p:cNvPr id="29" name="Shape 27"/>
+          <p:cNvSpPr/>
+          <p:nvPr/>
+        </p:nvSpPr>
+        <p:spPr>
+          <a:xfrm>
+            <a:off x="548640" y="5166360"/>
+            <a:ext cx="11109960" cy="603504"/>
+          </a:xfrm>
+          <a:prstGeom prst="roundRect">
+            <a:avLst>
+              <a:gd name="adj" fmla="val 9091"/>
+            </a:avLst>
+          </a:prstGeom>
+          <a:solidFill>
+            <a:srgbClr val="FFFFFF"/>
+          </a:solidFill>
+          <a:ln w="12700">
+            <a:solidFill>
+              <a:srgbClr val="E7EFF5"/>
+            </a:solidFill>
+            <a:prstDash val="solid"/>
+          </a:ln>
+        </p:spPr>
+      </p:sp>
+      <p:sp>
+        <p:nvSpPr>
+          <p:cNvPr id="30" name="Shape 28"/>
+          <p:cNvSpPr/>
+          <p:nvPr/>
+        </p:nvSpPr>
+        <p:spPr>
+          <a:xfrm>
+            <a:off x="713232" y="5285232"/>
+            <a:ext cx="365760" cy="365760"/>
+          </a:xfrm>
+          <a:prstGeom prst="ellipse">
+            <a:avLst/>
+          </a:prstGeom>
+          <a:solidFill>
+            <a:srgbClr val="0090DA"/>
+          </a:solidFill>
+          <a:ln/>
+        </p:spPr>
+      </p:sp>
+      <p:sp>
+        <p:nvSpPr>
+          <p:cNvPr id="31" name="Text 29"/>
+          <p:cNvSpPr/>
+          <p:nvPr/>
+        </p:nvSpPr>
+        <p:spPr>
+          <a:xfrm>
+            <a:off x="713232" y="5285232"/>
+            <a:ext cx="365760" cy="365760"/>
+          </a:xfrm>
+          <a:prstGeom prst="rect">
+            <a:avLst/>
+          </a:prstGeom>
+          <a:noFill/>
+          <a:ln/>
+        </p:spPr>
+        <p:txBody>
+          <a:bodyPr wrap="square" lIns="0" tIns="0" rIns="0" bIns="0" rtlCol="0" anchor="ctr"/>
+          <a:lstStyle/>
+          <a:p>
+            <a:pPr algn="ctr" indent="0" marL="0">
+              <a:buNone/>
+            </a:pPr>
+            <a:r>
+              <a:rPr lang="en-US" sz="1300" dirty="0">
+                <a:solidFill>
+                  <a:srgbClr val="000000"/>
+                </a:solidFill>
+              </a:rPr>
+              <a:t>🔗</a:t>
+            </a:r>
+            <a:endParaRPr lang="en-US" sz="1300" dirty="0"/>
+          </a:p>
+        </p:txBody>
+      </p:sp>
+      <p:sp>
+        <p:nvSpPr>
+          <p:cNvPr id="32" name="Text 30"/>
+          <p:cNvSpPr/>
+          <p:nvPr/>
+        </p:nvSpPr>
+        <p:spPr>
+          <a:xfrm>
+            <a:off x="1280160" y="5166360"/>
+            <a:ext cx="3931920" cy="603504"/>
+          </a:xfrm>
+          <a:prstGeom prst="rect">
+            <a:avLst/>
+          </a:prstGeom>
+          <a:noFill/>
+          <a:ln/>
+        </p:spPr>
+        <p:txBody>
+          <a:bodyPr wrap="square" lIns="0" tIns="0" rIns="0" bIns="0" rtlCol="0" anchor="ctr"/>
+          <a:lstStyle/>
+          <a:p>
+            <a:pPr indent="0" marL="0">
+              <a:buNone/>
+            </a:pPr>
+            <a:r>
+              <a:rPr lang="en-US" sz="1350" b="1" dirty="0">
+                <a:solidFill>
+                  <a:srgbClr val="1B2A38"/>
+                </a:solidFill>
+                <a:latin typeface="Calibri" pitchFamily="34" charset="0"/>
+                <a:ea typeface="Calibri" pitchFamily="34" charset="-122"/>
+                <a:cs typeface="Calibri" pitchFamily="34" charset="-120"/>
+              </a:rPr>
+              <a:t>LinkedIn</a:t>
+            </a:r>
+            <a:endParaRPr lang="en-US" sz="1350" dirty="0"/>
+          </a:p>
+        </p:txBody>
+      </p:sp>
+      <p:sp>
+        <p:nvSpPr>
+          <p:cNvPr id="33" name="Text 31"/>
+          <p:cNvSpPr/>
+          <p:nvPr/>
+        </p:nvSpPr>
+        <p:spPr>
+          <a:xfrm>
+            <a:off x="5303520" y="5166360"/>
+            <a:ext cx="6126480" cy="603504"/>
+          </a:xfrm>
+          <a:prstGeom prst="rect">
+            <a:avLst/>
+          </a:prstGeom>
+          <a:noFill/>
+          <a:ln/>
+        </p:spPr>
+        <p:txBody>
+          <a:bodyPr wrap="square" lIns="0" tIns="0" rIns="0" bIns="0" rtlCol="0" anchor="ctr"/>
+          <a:lstStyle/>
+          <a:p>
+            <a:pPr indent="0" marL="0">
+              <a:buNone/>
+            </a:pPr>
+            <a:r>
+              <a:rPr lang="en-US" sz="1250" dirty="0">
+                <a:solidFill>
+                  <a:srgbClr val="0090DA"/>
+                </a:solidFill>
+                <a:latin typeface="Calibri" pitchFamily="34" charset="0"/>
+                <a:ea typeface="Calibri" pitchFamily="34" charset="-122"/>
+                <a:cs typeface="Calibri" pitchFamily="34" charset="-120"/>
+              </a:rPr>
+              <a:t>linkedin.com/in/pavelbodle</a:t>
+            </a:r>
+            <a:endParaRPr lang="en-US" sz="1250" dirty="0"/>
+          </a:p>
+        </p:txBody>
+      </p:sp>
+      <p:sp>
+        <p:nvSpPr>
+          <p:cNvPr id="34" name="Shape 32"/>
+          <p:cNvSpPr/>
+          <p:nvPr/>
+        </p:nvSpPr>
+        <p:spPr>
+          <a:xfrm>
+            <a:off x="548640" y="5843016"/>
+            <a:ext cx="11109960" cy="603504"/>
+          </a:xfrm>
+          <a:prstGeom prst="roundRect">
+            <a:avLst>
+              <a:gd name="adj" fmla="val 9091"/>
+            </a:avLst>
+          </a:prstGeom>
+          <a:solidFill>
+            <a:srgbClr val="FFFFFF"/>
+          </a:solidFill>
+          <a:ln w="12700">
+            <a:solidFill>
+              <a:srgbClr val="E7EFF5"/>
+            </a:solidFill>
+            <a:prstDash val="solid"/>
+          </a:ln>
+        </p:spPr>
+      </p:sp>
+      <p:sp>
+        <p:nvSpPr>
+          <p:cNvPr id="35" name="Shape 33"/>
+          <p:cNvSpPr/>
+          <p:nvPr/>
+        </p:nvSpPr>
+        <p:spPr>
+          <a:xfrm>
+            <a:off x="713232" y="5961888"/>
+            <a:ext cx="365760" cy="365760"/>
+          </a:xfrm>
+          <a:prstGeom prst="ellipse">
+            <a:avLst/>
+          </a:prstGeom>
+          <a:solidFill>
+            <a:srgbClr val="5B6770"/>
+          </a:solidFill>
+          <a:ln/>
+        </p:spPr>
+      </p:sp>
+      <p:sp>
+        <p:nvSpPr>
+          <p:cNvPr id="36" name="Text 34"/>
+          <p:cNvSpPr/>
+          <p:nvPr/>
+        </p:nvSpPr>
+        <p:spPr>
+          <a:xfrm>
+            <a:off x="713232" y="5961888"/>
+            <a:ext cx="365760" cy="365760"/>
+          </a:xfrm>
+          <a:prstGeom prst="rect">
+            <a:avLst/>
+          </a:prstGeom>
+          <a:noFill/>
+          <a:ln/>
+        </p:spPr>
+        <p:txBody>
+          <a:bodyPr wrap="square" lIns="0" tIns="0" rIns="0" bIns="0" rtlCol="0" anchor="ctr"/>
+          <a:lstStyle/>
+          <a:p>
+            <a:pPr algn="ctr" indent="0" marL="0">
+              <a:buNone/>
+            </a:pPr>
+            <a:r>
+              <a:rPr lang="en-US" sz="1300" dirty="0">
+                <a:solidFill>
+                  <a:srgbClr val="000000"/>
+                </a:solidFill>
+              </a:rPr>
+              <a:t>📧</a:t>
+            </a:r>
+            <a:endParaRPr lang="en-US" sz="1300" dirty="0"/>
+          </a:p>
+        </p:txBody>
+      </p:sp>
+      <p:sp>
+        <p:nvSpPr>
+          <p:cNvPr id="37" name="Text 35"/>
+          <p:cNvSpPr/>
+          <p:nvPr/>
+        </p:nvSpPr>
+        <p:spPr>
+          <a:xfrm>
+            <a:off x="1280160" y="5843016"/>
+            <a:ext cx="3931920" cy="603504"/>
+          </a:xfrm>
+          <a:prstGeom prst="rect">
+            <a:avLst/>
+          </a:prstGeom>
+          <a:noFill/>
+          <a:ln/>
+        </p:spPr>
+        <p:txBody>
+          <a:bodyPr wrap="square" lIns="0" tIns="0" rIns="0" bIns="0" rtlCol="0" anchor="ctr"/>
+          <a:lstStyle/>
+          <a:p>
+            <a:pPr indent="0" marL="0">
+              <a:buNone/>
+            </a:pPr>
+            <a:r>
+              <a:rPr lang="en-US" sz="1350" b="1" dirty="0">
+                <a:solidFill>
+                  <a:srgbClr val="1B2A38"/>
+                </a:solidFill>
+                <a:latin typeface="Calibri" pitchFamily="34" charset="0"/>
+                <a:ea typeface="Calibri" pitchFamily="34" charset="-122"/>
+                <a:cs typeface="Calibri" pitchFamily="34" charset="-120"/>
+              </a:rPr>
+              <a:t>Email</a:t>
+            </a:r>
+            <a:endParaRPr lang="en-US" sz="1350" dirty="0"/>
+          </a:p>
+        </p:txBody>
+      </p:sp>
+      <p:sp>
+        <p:nvSpPr>
+          <p:cNvPr id="38" name="Text 36"/>
+          <p:cNvSpPr/>
+          <p:nvPr/>
+        </p:nvSpPr>
+        <p:spPr>
+          <a:xfrm>
+            <a:off x="5303520" y="5843016"/>
+            <a:ext cx="6126480" cy="603504"/>
+          </a:xfrm>
+          <a:prstGeom prst="rect">
+            <a:avLst/>
+          </a:prstGeom>
+          <a:noFill/>
+          <a:ln/>
+        </p:spPr>
+        <p:txBody>
+          <a:bodyPr wrap="square" lIns="0" tIns="0" rIns="0" bIns="0" rtlCol="0" anchor="ctr"/>
+          <a:lstStyle/>
+          <a:p>
+            <a:pPr indent="0" marL="0">
+              <a:buNone/>
+            </a:pPr>
+            <a:r>
+              <a:rPr lang="en-US" sz="1250" dirty="0">
+                <a:solidFill>
+                  <a:srgbClr val="0090DA"/>
+                </a:solidFill>
+                <a:latin typeface="Calibri" pitchFamily="34" charset="0"/>
+                <a:ea typeface="Calibri" pitchFamily="34" charset="-122"/>
+                <a:cs typeface="Calibri" pitchFamily="34" charset="-120"/>
+              </a:rPr>
+              <a:t>paveliitb@gmail.com</a:t>
+            </a:r>
+            <a:endParaRPr lang="en-US" sz="1250" dirty="0"/>
+          </a:p>
+        </p:txBody>
+      </p:sp>
+      <p:sp>
+        <p:nvSpPr>
+          <p:cNvPr id="39" name="Text 37"/>
+          <p:cNvSpPr/>
+          <p:nvPr/>
+        </p:nvSpPr>
+        <p:spPr>
+          <a:xfrm>
+            <a:off x="548640" y="6400800"/>
+            <a:ext cx="10972800" cy="274320"/>
+          </a:xfrm>
+          <a:prstGeom prst="rect">
+            <a:avLst/>
+          </a:prstGeom>
+          <a:noFill/>
+          <a:ln/>
+        </p:spPr>
+        <p:txBody>
+          <a:bodyPr wrap="square" lIns="0" tIns="0" rIns="0" bIns="0" rtlCol="0" anchor="ctr"/>
+          <a:lstStyle/>
+          <a:p>
+            <a:pPr indent="0" marL="0">
+              <a:buNone/>
+            </a:pPr>
+            <a:r>
+              <a:rPr lang="en-US" sz="1000" i="1" dirty="0">
+                <a:solidFill>
+                  <a:srgbClr val="5B6770"/>
+                </a:solidFill>
+                <a:latin typeface="Calibri" pitchFamily="34" charset="0"/>
+                <a:ea typeface="Calibri" pitchFamily="34" charset="-122"/>
+                <a:cs typeface="Calibri" pitchFamily="34" charset="-120"/>
+              </a:rPr>
+              <a:t>Replace the placeholders above with your live links before presenting.</a:t>
+            </a:r>
+            <a:endParaRPr lang="en-US" sz="1000" dirty="0"/>
           </a:p>
         </p:txBody>
       </p:sp>
@@ -6429,7 +8135,7 @@
                 <a:ea typeface="Calibri" pitchFamily="34" charset="-122"/>
                 <a:cs typeface="Calibri" pitchFamily="34" charset="-120"/>
               </a:rPr>
-              <a:t>MetLife Japan · High-Risk Customer Prediction</a:t>
+              <a:t>High-Risk Customer Prediction · Pavel Bodle</a:t>
             </a:r>
             <a:endParaRPr lang="en-US" sz="900" dirty="0"/>
           </a:p>
@@ -6578,7 +8284,7 @@
                 <a:ea typeface="Cambria" pitchFamily="34" charset="-122"/>
                 <a:cs typeface="Cambria" pitchFamily="34" charset="-120"/>
               </a:rPr>
-              <a:t>insurance_test_data.csv at a glance</a:t>
+              <a:t>The data at a glance</a:t>
             </a:r>
             <a:endParaRPr lang="en-US" sz="3200" dirty="0"/>
           </a:p>
@@ -7734,7 +9440,7 @@
                 <a:ea typeface="Calibri" pitchFamily="34" charset="-122"/>
                 <a:cs typeface="Calibri" pitchFamily="34" charset="-120"/>
               </a:rPr>
-              <a:t>MetLife Japan · High-Risk Customer Prediction</a:t>
+              <a:t>High-Risk Customer Prediction · Pavel Bodle</a:t>
             </a:r>
             <a:endParaRPr lang="en-US" sz="900" dirty="0"/>
           </a:p>
@@ -8987,7 +10693,7 @@
                 <a:ea typeface="Calibri" pitchFamily="34" charset="-122"/>
                 <a:cs typeface="Calibri" pitchFamily="34" charset="-120"/>
               </a:rPr>
-              <a:t>MetLife Japan · High-Risk Customer Prediction</a:t>
+              <a:t>High-Risk Customer Prediction · Pavel Bodle</a:t>
             </a:r>
             <a:endParaRPr lang="en-US" sz="900" dirty="0"/>
           </a:p>
@@ -9543,7 +11249,7 @@
                 <a:ea typeface="Calibri" pitchFamily="34" charset="-122"/>
                 <a:cs typeface="Calibri" pitchFamily="34" charset="-120"/>
               </a:rPr>
-              <a:t>MetLife Japan · High-Risk Customer Prediction</a:t>
+              <a:t>High-Risk Customer Prediction · Pavel Bodle</a:t>
             </a:r>
             <a:endParaRPr lang="en-US" sz="900" dirty="0"/>
           </a:p>
@@ -10011,7 +11717,7 @@
                 <a:ea typeface="Calibri" pitchFamily="34" charset="-122"/>
                 <a:cs typeface="Calibri" pitchFamily="34" charset="-120"/>
               </a:rPr>
-              <a:t>MetLife Japan · High-Risk Customer Prediction</a:t>
+              <a:t>High-Risk Customer Prediction · Pavel Bodle</a:t>
             </a:r>
             <a:endParaRPr lang="en-US" sz="900" dirty="0"/>
           </a:p>
@@ -10844,7 +12550,7 @@
                 <a:ea typeface="Calibri" pitchFamily="34" charset="-122"/>
                 <a:cs typeface="Calibri" pitchFamily="34" charset="-120"/>
               </a:rPr>
-              <a:t>MetLife Japan · High-Risk Customer Prediction</a:t>
+              <a:t>High-Risk Customer Prediction · Pavel Bodle</a:t>
             </a:r>
             <a:endParaRPr lang="en-US" sz="900" dirty="0"/>
           </a:p>
@@ -12361,7 +14067,7 @@
                 <a:ea typeface="Calibri" pitchFamily="34" charset="-122"/>
                 <a:cs typeface="Calibri" pitchFamily="34" charset="-120"/>
               </a:rPr>
-              <a:t>MetLife Japan · High-Risk Customer Prediction</a:t>
+              <a:t>High-Risk Customer Prediction · Pavel Bodle</a:t>
             </a:r>
             <a:endParaRPr lang="en-US" sz="900" dirty="0"/>
           </a:p>
@@ -12993,7 +14699,7 @@
                 <a:ea typeface="Calibri" pitchFamily="34" charset="-122"/>
                 <a:cs typeface="Calibri" pitchFamily="34" charset="-120"/>
               </a:rPr>
-              <a:t>MetLife Japan · High-Risk Customer Prediction</a:t>
+              <a:t>High-Risk Customer Prediction · Pavel Bodle</a:t>
             </a:r>
             <a:endParaRPr lang="en-US" sz="900" dirty="0"/>
           </a:p>
